--- a/eval-deck.pptx
+++ b/eval-deck.pptx
@@ -34,6 +34,8 @@
     <p:sldId id="282" r:id="rId29"/>
     <p:sldId id="283" r:id="rId30"/>
     <p:sldId id="284" r:id="rId31"/>
+    <p:sldId id="285" r:id="rId32"/>
+    <p:sldId id="286" r:id="rId33"/>
   </p:sldIdLst>
   <p:sldSz cx="9144000" cy="6858000"/>
   <p:notesSz cx="6858000" cy="9144000"/>
@@ -250,7 +252,7 @@
                   <a:srgbClr val="595959"/>
                 </a:solidFill>
               </a:rPr>
-              <a:t>Readout date: 2026-10-03</a:t>
+              <a:t>Readout date: 2026-10-05</a:t>
             </a:r>
           </a:p>
           <a:p>
@@ -290,6 +292,241 @@
 </file>
 
 <file path=ppt/slides/slide10.xml><?xml version="1.0" encoding="utf-8"?>
+<p:sld xmlns:a="http://schemas.openxmlformats.org/drawingml/2006/main" xmlns:p="http://schemas.openxmlformats.org/presentationml/2006/main" xmlns:r="http://schemas.openxmlformats.org/officeDocument/2006/relationships">
+  <p:cSld>
+    <p:spTree>
+      <p:nvGrpSpPr>
+        <p:cNvPr id="1" name=""/>
+        <p:cNvGrpSpPr/>
+        <p:nvPr/>
+      </p:nvGrpSpPr>
+      <p:grpSpPr>
+        <a:xfrm>
+          <a:off x="0" y="0"/>
+          <a:ext cx="0" cy="0"/>
+          <a:chOff x="0" y="0"/>
+          <a:chExt cx="0" cy="0"/>
+        </a:xfrm>
+      </p:grpSpPr>
+      <p:sp>
+        <p:nvSpPr>
+          <p:cNvPr id="2" name="Title"/>
+          <p:cNvSpPr>
+            <a:spLocks noGrp="1"/>
+          </p:cNvSpPr>
+          <p:nvPr/>
+        </p:nvSpPr>
+        <p:spPr>
+          <a:xfrm>
+            <a:off x="685800" y="274638"/>
+            <a:ext cx="7772400" cy="800000"/>
+          </a:xfrm>
+          <a:prstGeom prst="rect">
+            <a:avLst/>
+          </a:prstGeom>
+          <a:noFill/>
+        </p:spPr>
+        <p:txBody>
+          <a:bodyPr wrap="square"/>
+          <a:lstStyle/>
+          <a:p>
+            <a:pPr>
+              <a:buNone/>
+            </a:pPr>
+            <a:r>
+              <a:rPr b="1" sz="2800">
+                <a:solidFill>
+                  <a:srgbClr val="1F3864"/>
+                </a:solidFill>
+              </a:rPr>
+              <a:t>Rubric v2 (constructs)</a:t>
+            </a:r>
+          </a:p>
+        </p:txBody>
+      </p:sp>
+      <p:sp>
+        <p:nvSpPr>
+          <p:cNvPr id="3" name="Rule"/>
+          <p:cNvSpPr>
+            <a:spLocks noGrp="1"/>
+          </p:cNvSpPr>
+          <p:nvPr/>
+        </p:nvSpPr>
+        <p:spPr>
+          <a:xfrm>
+            <a:off x="685800" y="1130000"/>
+            <a:ext cx="7772400" cy="45000"/>
+          </a:xfrm>
+          <a:prstGeom prst="rect">
+            <a:avLst/>
+          </a:prstGeom>
+          <a:solidFill>
+            <a:srgbClr val="2E75B6"/>
+          </a:solidFill>
+        </p:spPr>
+        <p:txBody>
+          <a:bodyPr wrap="square"/>
+          <a:lstStyle/>
+        </p:txBody>
+      </p:sp>
+      <p:sp>
+        <p:nvSpPr>
+          <p:cNvPr id="4" name="Content"/>
+          <p:cNvSpPr>
+            <a:spLocks noGrp="1"/>
+          </p:cNvSpPr>
+          <p:nvPr/>
+        </p:nvSpPr>
+        <p:spPr>
+          <a:xfrm>
+            <a:off x="685800" y="1350000"/>
+            <a:ext cx="7772400" cy="5000000"/>
+          </a:xfrm>
+          <a:prstGeom prst="rect">
+            <a:avLst/>
+          </a:prstGeom>
+          <a:noFill/>
+        </p:spPr>
+        <p:txBody>
+          <a:bodyPr wrap="square"/>
+          <a:lstStyle/>
+          <a:p>
+            <a:pPr>
+              <a:buChar char="•"/>
+            </a:pPr>
+            <a:r>
+              <a:rPr b="1" sz="1600"/>
+              <a:t>descriptive_accuracy: The alt text correctly describes what is actually visible: objects, setting, and the salient visual details a sighted person would notice.</a:t>
+            </a:r>
+          </a:p>
+          <a:p>
+            <a:pPr>
+              <a:buChar char="•"/>
+            </a:pPr>
+            <a:r>
+              <a:rPr b="1" sz="1600"/>
+              <a:t>functional_usefulness: The alt text serves the listener's actual need in context: a PowerPoint audience member on a screen reader learns what the image is doing on the slide, not just what it looks like.</a:t>
+            </a:r>
+          </a:p>
+          <a:p>
+            <a:pPr>
+              <a:buChar char="•"/>
+            </a:pPr>
+            <a:r>
+              <a:rPr b="1" sz="1600"/>
+              <a:t>concision: The alt text is appropriately brief: complete in one breath, roughly under 125 characters, with no filler phrases like 'image of' or 'in this image we can see'.</a:t>
+            </a:r>
+          </a:p>
+        </p:txBody>
+      </p:sp>
+    </p:spTree>
+  </p:cSld>
+  <p:clrMapOvr>
+    <a:overrideClrMapping bg1="lt1" tx1="dk1" bg2="lt2" tx2="dk2" accent1="accent1" accent2="accent2" accent3="accent3" accent4="accent4" accent5="accent5" accent6="accent6" hlink="hlink" folHlink="folHlink"/>
+  </p:clrMapOvr>
+</p:sld>
+</file>
+
+<file path=ppt/slides/slide11.xml><?xml version="1.0" encoding="utf-8"?>
+<p:sld xmlns:a="http://schemas.openxmlformats.org/drawingml/2006/main" xmlns:p="http://schemas.openxmlformats.org/presentationml/2006/main" xmlns:r="http://schemas.openxmlformats.org/officeDocument/2006/relationships">
+  <p:cSld>
+    <p:spTree>
+      <p:nvGrpSpPr>
+        <p:cNvPr id="1" name=""/>
+        <p:cNvGrpSpPr/>
+        <p:nvPr/>
+      </p:nvGrpSpPr>
+      <p:grpSpPr>
+        <a:xfrm>
+          <a:off x="0" y="0"/>
+          <a:ext cx="0" cy="0"/>
+          <a:chOff x="0" y="0"/>
+          <a:chExt cx="0" cy="0"/>
+        </a:xfrm>
+      </p:grpSpPr>
+      <p:sp>
+        <p:nvSpPr>
+          <p:cNvPr id="2" name="BG"/>
+          <p:cNvSpPr>
+            <a:spLocks noGrp="1"/>
+          </p:cNvSpPr>
+          <p:nvPr/>
+        </p:nvSpPr>
+        <p:spPr>
+          <a:xfrm>
+            <a:off x="0" y="0"/>
+            <a:ext cx="9144000" cy="6858000"/>
+          </a:xfrm>
+          <a:prstGeom prst="rect">
+            <a:avLst/>
+          </a:prstGeom>
+          <a:solidFill>
+            <a:srgbClr val="0F6CBD"/>
+          </a:solidFill>
+        </p:spPr>
+        <p:txBody>
+          <a:bodyPr wrap="square"/>
+          <a:lstStyle/>
+        </p:txBody>
+      </p:sp>
+      <p:sp>
+        <p:nvSpPr>
+          <p:cNvPr id="3" name="SecTitle"/>
+          <p:cNvSpPr>
+            <a:spLocks noGrp="1"/>
+          </p:cNvSpPr>
+          <p:nvPr/>
+        </p:nvSpPr>
+        <p:spPr>
+          <a:xfrm>
+            <a:off x="685800" y="2500000"/>
+            <a:ext cx="7772400" cy="1400000"/>
+          </a:xfrm>
+          <a:prstGeom prst="rect">
+            <a:avLst/>
+          </a:prstGeom>
+          <a:noFill/>
+        </p:spPr>
+        <p:txBody>
+          <a:bodyPr wrap="square"/>
+          <a:lstStyle/>
+          <a:p>
+            <a:pPr>
+              <a:buNone/>
+            </a:pPr>
+            <a:r>
+              <a:rPr b="1" sz="4000">
+                <a:solidFill>
+                  <a:srgbClr val="FFFFFF"/>
+                </a:solidFill>
+              </a:rPr>
+              <a:t>Findings</a:t>
+            </a:r>
+          </a:p>
+          <a:p>
+            <a:pPr>
+              <a:buNone/>
+            </a:pPr>
+            <a:r>
+              <a:rPr sz="1800">
+                <a:solidFill>
+                  <a:srgbClr val="FFFFFF"/>
+                </a:solidFill>
+              </a:rPr>
+              <a:t>What the panel found.</a:t>
+            </a:r>
+          </a:p>
+        </p:txBody>
+      </p:sp>
+    </p:spTree>
+  </p:cSld>
+  <p:clrMapOvr>
+    <a:overrideClrMapping bg1="lt1" tx1="dk1" bg2="lt2" tx2="dk2" accent1="accent1" accent2="accent2" accent3="accent3" accent4="accent4" accent5="accent5" accent6="accent6" hlink="hlink" folHlink="folHlink"/>
+  </p:clrMapOvr>
+</p:sld>
+</file>
+
+<file path=ppt/slides/slide12.xml><?xml version="1.0" encoding="utf-8"?>
 <p:sld xmlns:a="http://schemas.openxmlformats.org/drawingml/2006/main" xmlns:p="http://schemas.openxmlformats.org/presentationml/2006/main" xmlns:r="http://schemas.openxmlformats.org/officeDocument/2006/relationships">
   <p:cSld>
     <p:spTree>
@@ -795,386 +1032,6 @@
 </p:sld>
 </file>
 
-<file path=ppt/slides/slide11.xml><?xml version="1.0" encoding="utf-8"?>
-<p:sld xmlns:a="http://schemas.openxmlformats.org/drawingml/2006/main" xmlns:p="http://schemas.openxmlformats.org/presentationml/2006/main" xmlns:r="http://schemas.openxmlformats.org/officeDocument/2006/relationships">
-  <p:cSld>
-    <p:spTree>
-      <p:nvGrpSpPr>
-        <p:cNvPr id="1" name=""/>
-        <p:cNvGrpSpPr/>
-        <p:nvPr/>
-      </p:nvGrpSpPr>
-      <p:grpSpPr>
-        <a:xfrm>
-          <a:off x="0" y="0"/>
-          <a:ext cx="0" cy="0"/>
-          <a:chOff x="0" y="0"/>
-          <a:chExt cx="0" cy="0"/>
-        </a:xfrm>
-      </p:grpSpPr>
-      <p:sp>
-        <p:nvSpPr>
-          <p:cNvPr id="2" name="Title"/>
-          <p:cNvSpPr>
-            <a:spLocks noGrp="1"/>
-          </p:cNvSpPr>
-          <p:nvPr/>
-        </p:nvSpPr>
-        <p:spPr>
-          <a:xfrm>
-            <a:off x="685800" y="274638"/>
-            <a:ext cx="7772400" cy="800000"/>
-          </a:xfrm>
-          <a:prstGeom prst="rect">
-            <a:avLst/>
-          </a:prstGeom>
-          <a:noFill/>
-        </p:spPr>
-        <p:txBody>
-          <a:bodyPr wrap="square"/>
-          <a:lstStyle/>
-          <a:p>
-            <a:pPr>
-              <a:buNone/>
-            </a:pPr>
-            <a:r>
-              <a:rPr b="1" sz="2800">
-                <a:solidFill>
-                  <a:srgbClr val="1F3864"/>
-                </a:solidFill>
-              </a:rPr>
-              <a:t>Where the judges disagreed</a:t>
-            </a:r>
-          </a:p>
-        </p:txBody>
-      </p:sp>
-      <p:sp>
-        <p:nvSpPr>
-          <p:cNvPr id="3" name="Rule"/>
-          <p:cNvSpPr>
-            <a:spLocks noGrp="1"/>
-          </p:cNvSpPr>
-          <p:nvPr/>
-        </p:nvSpPr>
-        <p:spPr>
-          <a:xfrm>
-            <a:off x="685800" y="1130000"/>
-            <a:ext cx="7772400" cy="45000"/>
-          </a:xfrm>
-          <a:prstGeom prst="rect">
-            <a:avLst/>
-          </a:prstGeom>
-          <a:solidFill>
-            <a:srgbClr val="2E75B6"/>
-          </a:solidFill>
-        </p:spPr>
-        <p:txBody>
-          <a:bodyPr wrap="square"/>
-          <a:lstStyle/>
-        </p:txBody>
-      </p:sp>
-      <p:sp>
-        <p:nvSpPr>
-          <p:cNvPr id="4" name="Content"/>
-          <p:cNvSpPr>
-            <a:spLocks noGrp="1"/>
-          </p:cNvSpPr>
-          <p:nvPr/>
-        </p:nvSpPr>
-        <p:spPr>
-          <a:xfrm>
-            <a:off x="685800" y="1350000"/>
-            <a:ext cx="7772400" cy="5000000"/>
-          </a:xfrm>
-          <a:prstGeom prst="rect">
-            <a:avLst/>
-          </a:prstGeom>
-          <a:noFill/>
-        </p:spPr>
-        <p:txBody>
-          <a:bodyPr wrap="square"/>
-          <a:lstStyle/>
-          <a:p>
-            <a:pPr>
-              <a:buChar char="•"/>
-            </a:pPr>
-            <a:r>
-              <a:rPr sz="1600"/>
-              <a:t>INPUT-09 · concision: you 1, Judge A 1, Judge B 2</a:t>
-            </a:r>
-          </a:p>
-          <a:p>
-            <a:pPr>
-              <a:buChar char="•"/>
-            </a:pPr>
-            <a:r>
-              <a:rPr sz="1600"/>
-              <a:t>INPUT-11 · concision: you 0, Judge A 0, Judge B 2</a:t>
-            </a:r>
-          </a:p>
-          <a:p>
-            <a:pPr>
-              <a:buChar char="•"/>
-            </a:pPr>
-            <a:r>
-              <a:rPr sz="1600"/>
-              <a:t>INPUT-08 · functional_usefulness: you 1, Judge A 1, Judge B 2</a:t>
-            </a:r>
-          </a:p>
-          <a:p>
-            <a:pPr>
-              <a:buChar char="•"/>
-            </a:pPr>
-            <a:r>
-              <a:rPr sz="1600"/>
-              <a:t>INPUT-03 · descriptive_accuracy: you 1, Judge A 2, Judge B 1</a:t>
-            </a:r>
-          </a:p>
-          <a:p>
-            <a:pPr>
-              <a:buChar char="•"/>
-            </a:pPr>
-            <a:r>
-              <a:rPr sz="1600"/>
-              <a:t>INPUT-06 · descriptive_accuracy: you 2, Judge A 1, Judge B 2</a:t>
-            </a:r>
-          </a:p>
-          <a:p>
-            <a:pPr>
-              <a:buChar char="•"/>
-            </a:pPr>
-            <a:r>
-              <a:rPr sz="1600"/>
-              <a:t>INPUT-11 · descriptive_accuracy: you 0, Judge A 0, Judge B 1</a:t>
-            </a:r>
-          </a:p>
-        </p:txBody>
-      </p:sp>
-    </p:spTree>
-  </p:cSld>
-  <p:clrMapOvr>
-    <a:overrideClrMapping bg1="lt1" tx1="dk1" bg2="lt2" tx2="dk2" accent1="accent1" accent2="accent2" accent3="accent3" accent4="accent4" accent5="accent5" accent6="accent6" hlink="hlink" folHlink="folHlink"/>
-  </p:clrMapOvr>
-</p:sld>
-</file>
-
-<file path=ppt/slides/slide12.xml><?xml version="1.0" encoding="utf-8"?>
-<p:sld xmlns:a="http://schemas.openxmlformats.org/drawingml/2006/main" xmlns:p="http://schemas.openxmlformats.org/presentationml/2006/main" xmlns:r="http://schemas.openxmlformats.org/officeDocument/2006/relationships">
-  <p:cSld>
-    <p:spTree>
-      <p:nvGrpSpPr>
-        <p:cNvPr id="1" name=""/>
-        <p:cNvGrpSpPr/>
-        <p:nvPr/>
-      </p:nvGrpSpPr>
-      <p:grpSpPr>
-        <a:xfrm>
-          <a:off x="0" y="0"/>
-          <a:ext cx="0" cy="0"/>
-          <a:chOff x="0" y="0"/>
-          <a:chExt cx="0" cy="0"/>
-        </a:xfrm>
-      </p:grpSpPr>
-      <p:sp>
-        <p:nvSpPr>
-          <p:cNvPr id="2" name="Title"/>
-          <p:cNvSpPr>
-            <a:spLocks noGrp="1"/>
-          </p:cNvSpPr>
-          <p:nvPr/>
-        </p:nvSpPr>
-        <p:spPr>
-          <a:xfrm>
-            <a:off x="685800" y="274638"/>
-            <a:ext cx="7772400" cy="800000"/>
-          </a:xfrm>
-          <a:prstGeom prst="rect">
-            <a:avLst/>
-          </a:prstGeom>
-          <a:noFill/>
-        </p:spPr>
-        <p:txBody>
-          <a:bodyPr wrap="square"/>
-          <a:lstStyle/>
-          <a:p>
-            <a:pPr>
-              <a:buNone/>
-            </a:pPr>
-            <a:r>
-              <a:rPr b="1" sz="2800">
-                <a:solidFill>
-                  <a:srgbClr val="1F3864"/>
-                </a:solidFill>
-              </a:rPr>
-              <a:t>Adjudication highlights</a:t>
-            </a:r>
-          </a:p>
-        </p:txBody>
-      </p:sp>
-      <p:sp>
-        <p:nvSpPr>
-          <p:cNvPr id="3" name="Rule"/>
-          <p:cNvSpPr>
-            <a:spLocks noGrp="1"/>
-          </p:cNvSpPr>
-          <p:nvPr/>
-        </p:nvSpPr>
-        <p:spPr>
-          <a:xfrm>
-            <a:off x="685800" y="1130000"/>
-            <a:ext cx="7772400" cy="45000"/>
-          </a:xfrm>
-          <a:prstGeom prst="rect">
-            <a:avLst/>
-          </a:prstGeom>
-          <a:solidFill>
-            <a:srgbClr val="2E75B6"/>
-          </a:solidFill>
-        </p:spPr>
-        <p:txBody>
-          <a:bodyPr wrap="square"/>
-          <a:lstStyle/>
-        </p:txBody>
-      </p:sp>
-      <p:sp>
-        <p:nvSpPr>
-          <p:cNvPr id="4" name="Content"/>
-          <p:cNvSpPr>
-            <a:spLocks noGrp="1"/>
-          </p:cNvSpPr>
-          <p:nvPr/>
-        </p:nvSpPr>
-        <p:spPr>
-          <a:xfrm>
-            <a:off x="685800" y="1350000"/>
-            <a:ext cx="7772400" cy="5000000"/>
-          </a:xfrm>
-          <a:prstGeom prst="rect">
-            <a:avLst/>
-          </a:prstGeom>
-          <a:noFill/>
-        </p:spPr>
-        <p:txBody>
-          <a:bodyPr wrap="square"/>
-          <a:lstStyle/>
-          <a:p>
-            <a:pPr>
-              <a:buChar char="•"/>
-            </a:pPr>
-            <a:r>
-              <a:rPr b="1" sz="1600"/>
-              <a:t>INPUT-03 · descriptive_accuracy: grader error</a:t>
-            </a:r>
-          </a:p>
-          <a:p>
-            <a:pPr>
-              <a:buChar char="•"/>
-            </a:pPr>
-            <a:r>
-              <a:rPr sz="1600"/>
-              <a:t>Judge A scored the words; the money detail (sun rays) was missed. No rubric change.</a:t>
-            </a:r>
-          </a:p>
-          <a:p>
-            <a:pPr>
-              <a:buChar char="•"/>
-            </a:pPr>
-            <a:r>
-              <a:rPr b="1" sz="1600"/>
-              <a:t>INPUT-06 · descriptive_accuracy: rubric ambiguity</a:t>
-            </a:r>
-          </a:p>
-          <a:p>
-            <a:pPr>
-              <a:buChar char="•"/>
-            </a:pPr>
-            <a:r>
-              <a:rPr sz="1600"/>
-              <a:t>Two reasonable graders split on whether 'colorful slides' is salient. v2 anchor: a missed salient detail caps accuracy at 1. Rubric bumped to v2.</a:t>
-            </a:r>
-          </a:p>
-          <a:p>
-            <a:pPr>
-              <a:buChar char="•"/>
-            </a:pPr>
-            <a:r>
-              <a:rPr b="1" sz="1600"/>
-              <a:t>INPUT-08 · functional_usefulness: my grade was wrong</a:t>
-            </a:r>
-          </a:p>
-          <a:p>
-            <a:pPr>
-              <a:buChar char="•"/>
-            </a:pPr>
-            <a:r>
-              <a:rPr sz="1600"/>
-              <a:t>Judge B was right: 'styled workspace photography' does signal the slide's remote-work theme. Corrected to 2, no rubric change.</a:t>
-            </a:r>
-          </a:p>
-          <a:p>
-            <a:pPr>
-              <a:buChar char="•"/>
-            </a:pPr>
-            <a:r>
-              <a:rPr b="1" sz="1600"/>
-              <a:t>INPUT-09 · concision: grader error</a:t>
-            </a:r>
-          </a:p>
-          <a:p>
-            <a:pPr>
-              <a:buChar char="•"/>
-            </a:pPr>
-            <a:r>
-              <a:rPr sz="1600"/>
-              <a:t>Judge B scored a filler-opening output 2 on concision. Second data point for the verbosity-bias note.</a:t>
-            </a:r>
-          </a:p>
-          <a:p>
-            <a:pPr>
-              <a:buChar char="•"/>
-            </a:pPr>
-            <a:r>
-              <a:rPr b="1" sz="1600"/>
-              <a:t>INPUT-11 · descriptive_accuracy: grader error</a:t>
-            </a:r>
-          </a:p>
-          <a:p>
-            <a:pPr>
-              <a:buChar char="•"/>
-            </a:pPr>
-            <a:r>
-              <a:rPr sz="1600"/>
-              <a:t>Judge B credited invented details (1960s, blue sky). Judge prompt already forbids invention; flagged in readout, no rubric change.</a:t>
-            </a:r>
-          </a:p>
-          <a:p>
-            <a:pPr>
-              <a:buChar char="•"/>
-            </a:pPr>
-            <a:r>
-              <a:rPr b="1" sz="1600"/>
-              <a:t>INPUT-11 · concision: grader error</a:t>
-            </a:r>
-          </a:p>
-          <a:p>
-            <a:pPr>
-              <a:buChar char="•"/>
-            </a:pPr>
-            <a:r>
-              <a:rPr sz="1600"/>
-              <a:t>Judge B scored a ~210-char padded output 2 on concision. Verbosity-bias note filed; Judge B blocked from concision until re-prompted.</a:t>
-            </a:r>
-          </a:p>
-        </p:txBody>
-      </p:sp>
-    </p:spTree>
-  </p:cSld>
-  <p:clrMapOvr>
-    <a:overrideClrMapping bg1="lt1" tx1="dk1" bg2="lt2" tx2="dk2" accent1="accent1" accent2="accent2" accent3="accent3" accent4="accent4" accent5="accent5" accent6="accent6" hlink="hlink" folHlink="folHlink"/>
-  </p:clrMapOvr>
-</p:sld>
-</file>
-
 <file path=ppt/slides/slide13.xml><?xml version="1.0" encoding="utf-8"?>
 <p:sld xmlns:a="http://schemas.openxmlformats.org/drawingml/2006/main" xmlns:p="http://schemas.openxmlformats.org/presentationml/2006/main" xmlns:r="http://schemas.openxmlformats.org/officeDocument/2006/relationships">
   <p:cSld>
@@ -1223,7 +1080,7 @@
                   <a:srgbClr val="1F3864"/>
                 </a:solidFill>
               </a:rPr>
-              <a:t>What the disagreements taught us</a:t>
+              <a:t>Where the judges disagreed</a:t>
             </a:r>
           </a:p>
         </p:txBody>
@@ -1280,7 +1137,52 @@
             </a:pPr>
             <a:r>
               <a:rPr sz="1600"/>
-              <a:t>v2 (2026-10-02): descriptive_accuracy: a missed salient detail caps accuracy at 1 (from INPUT-06 adjudication).</a:t>
+              <a:t>INPUT-09 · concision: you 1, Judge A 1, Judge B 2</a:t>
+            </a:r>
+          </a:p>
+          <a:p>
+            <a:pPr>
+              <a:buChar char="•"/>
+            </a:pPr>
+            <a:r>
+              <a:rPr sz="1600"/>
+              <a:t>INPUT-11 · concision: you 0, Judge A 0, Judge B 2</a:t>
+            </a:r>
+          </a:p>
+          <a:p>
+            <a:pPr>
+              <a:buChar char="•"/>
+            </a:pPr>
+            <a:r>
+              <a:rPr sz="1600"/>
+              <a:t>INPUT-08 · functional_usefulness: you 1, Judge A 1, Judge B 2</a:t>
+            </a:r>
+          </a:p>
+          <a:p>
+            <a:pPr>
+              <a:buChar char="•"/>
+            </a:pPr>
+            <a:r>
+              <a:rPr sz="1600"/>
+              <a:t>INPUT-03 · descriptive_accuracy: you 1, Judge A 2, Judge B 1</a:t>
+            </a:r>
+          </a:p>
+          <a:p>
+            <a:pPr>
+              <a:buChar char="•"/>
+            </a:pPr>
+            <a:r>
+              <a:rPr sz="1600"/>
+              <a:t>INPUT-06 · descriptive_accuracy: you 2, Judge A 1, Judge B 2</a:t>
+            </a:r>
+          </a:p>
+          <a:p>
+            <a:pPr>
+              <a:buChar char="•"/>
+            </a:pPr>
+            <a:r>
+              <a:rPr sz="1600"/>
+              <a:t>INPUT-11 · descriptive_accuracy: you 0, Judge A 0, Judge B 1</a:t>
             </a:r>
           </a:p>
         </p:txBody>
@@ -1341,7 +1243,7 @@
                   <a:srgbClr val="1F3864"/>
                 </a:solidFill>
               </a:rPr>
-              <a:t>Bias checks</a:t>
+              <a:t>Adjudication highlights</a:t>
             </a:r>
           </a:p>
         </p:txBody>
@@ -1398,16 +1300,16 @@
             </a:pPr>
             <a:r>
               <a:rPr b="1" sz="1600"/>
-              <a:t>verbosity · Judge B</a:t>
-            </a:r>
-          </a:p>
-          <a:p>
-            <a:pPr>
-              <a:buChar char="•"/>
-            </a:pPr>
-            <a:r>
-              <a:rPr sz="1600"/>
-              <a:t>Generous to long outputs: scored 2 vs human 0 on INPUT-11 concision (~210 chars); 2 vs 1 on INPUT-09. Do not trust Judge B on concision until re-prompted.</a:t>
+              <a:t>INPUT-03 · descriptive_accuracy: grader error</a:t>
+            </a:r>
+          </a:p>
+          <a:p>
+            <a:pPr>
+              <a:buChar char="•"/>
+            </a:pPr>
+            <a:r>
+              <a:rPr sz="1600"/>
+              <a:t>Judge A scored the words; the money detail (sun rays) was missed. No rubric change.</a:t>
             </a:r>
           </a:p>
           <a:p>
@@ -1416,16 +1318,88 @@
             </a:pPr>
             <a:r>
               <a:rPr b="1" sz="1600"/>
-              <a:t>position · Judge A</a:t>
-            </a:r>
-          </a:p>
-          <a:p>
-            <a:pPr>
-              <a:buChar char="•"/>
-            </a:pPr>
-            <a:r>
-              <a:rPr sz="1600"/>
-              <a:t>No position effect observed: single-output grading, no pairwise presentation in this pilot.</a:t>
+              <a:t>INPUT-06 · descriptive_accuracy: rubric ambiguity</a:t>
+            </a:r>
+          </a:p>
+          <a:p>
+            <a:pPr>
+              <a:buChar char="•"/>
+            </a:pPr>
+            <a:r>
+              <a:rPr sz="1600"/>
+              <a:t>Two reasonable graders split on whether 'colorful slides' is salient. v2 anchor: a missed salient detail caps accuracy at 1. Rubric bumped to v2.</a:t>
+            </a:r>
+          </a:p>
+          <a:p>
+            <a:pPr>
+              <a:buChar char="•"/>
+            </a:pPr>
+            <a:r>
+              <a:rPr b="1" sz="1600"/>
+              <a:t>INPUT-08 · functional_usefulness: my grade was wrong</a:t>
+            </a:r>
+          </a:p>
+          <a:p>
+            <a:pPr>
+              <a:buChar char="•"/>
+            </a:pPr>
+            <a:r>
+              <a:rPr sz="1600"/>
+              <a:t>Judge B was right: 'styled workspace photography' does signal the slide's remote-work theme. Corrected to 2, no rubric change.</a:t>
+            </a:r>
+          </a:p>
+          <a:p>
+            <a:pPr>
+              <a:buChar char="•"/>
+            </a:pPr>
+            <a:r>
+              <a:rPr b="1" sz="1600"/>
+              <a:t>INPUT-09 · concision: grader error</a:t>
+            </a:r>
+          </a:p>
+          <a:p>
+            <a:pPr>
+              <a:buChar char="•"/>
+            </a:pPr>
+            <a:r>
+              <a:rPr sz="1600"/>
+              <a:t>Judge B scored a filler-opening output 2 on concision. Second data point for the verbosity-bias note.</a:t>
+            </a:r>
+          </a:p>
+          <a:p>
+            <a:pPr>
+              <a:buChar char="•"/>
+            </a:pPr>
+            <a:r>
+              <a:rPr b="1" sz="1600"/>
+              <a:t>INPUT-11 · descriptive_accuracy: grader error</a:t>
+            </a:r>
+          </a:p>
+          <a:p>
+            <a:pPr>
+              <a:buChar char="•"/>
+            </a:pPr>
+            <a:r>
+              <a:rPr sz="1600"/>
+              <a:t>Judge B credited invented details (1960s, blue sky). Judge prompt already forbids invention; flagged in readout, no rubric change.</a:t>
+            </a:r>
+          </a:p>
+          <a:p>
+            <a:pPr>
+              <a:buChar char="•"/>
+            </a:pPr>
+            <a:r>
+              <a:rPr b="1" sz="1600"/>
+              <a:t>INPUT-11 · concision: grader error</a:t>
+            </a:r>
+          </a:p>
+          <a:p>
+            <a:pPr>
+              <a:buChar char="•"/>
+            </a:pPr>
+            <a:r>
+              <a:rPr sz="1600"/>
+              <a:t>Judge B scored a ~210-char padded output 2 on concision. Verbosity-bias note filed; Judge B blocked from concision until re-prompted.</a:t>
             </a:r>
           </a:p>
         </p:txBody>
@@ -1486,7 +1460,7 @@
                   <a:srgbClr val="1F3864"/>
                 </a:solidFill>
               </a:rPr>
-              <a:t>Operating decisions</a:t>
+              <a:t>What the disagreements taught us</a:t>
             </a:r>
           </a:p>
         </p:txBody>
@@ -1543,7 +1517,7 @@
             </a:pPr>
             <a:r>
               <a:rPr sz="1600"/>
-              <a:t>(Record the call in Step 20 first.)</a:t>
+              <a:t>v2 (2026-10-02): descriptive_accuracy: a missed salient detail caps accuracy at 1 (from INPUT-06 adjudication).</a:t>
             </a:r>
           </a:p>
         </p:txBody>
@@ -1604,7 +1578,7 @@
                   <a:srgbClr val="1F3864"/>
                 </a:solidFill>
               </a:rPr>
-              <a:t>Customer problem statements</a:t>
+              <a:t>Bias checks</a:t>
             </a:r>
           </a:p>
         </p:txBody>
@@ -1660,8 +1634,35 @@
               <a:buChar char="•"/>
             </a:pPr>
             <a:r>
-              <a:rPr sz="1600"/>
-              <a:t>(Write them in Step 22 first.)</a:t>
+              <a:rPr b="1" sz="1600"/>
+              <a:t>verbosity · Judge B</a:t>
+            </a:r>
+          </a:p>
+          <a:p>
+            <a:pPr>
+              <a:buChar char="•"/>
+            </a:pPr>
+            <a:r>
+              <a:rPr sz="1600"/>
+              <a:t>Generous to long outputs: scored 2 vs human 0 on INPUT-11 concision (~210 chars); 2 vs 1 on INPUT-09. Do not trust Judge B on concision until re-prompted.</a:t>
+            </a:r>
+          </a:p>
+          <a:p>
+            <a:pPr>
+              <a:buChar char="•"/>
+            </a:pPr>
+            <a:r>
+              <a:rPr b="1" sz="1600"/>
+              <a:t>position · Judge A</a:t>
+            </a:r>
+          </a:p>
+          <a:p>
+            <a:pPr>
+              <a:buChar char="•"/>
+            </a:pPr>
+            <a:r>
+              <a:rPr sz="1600"/>
+              <a:t>No position effect observed: single-output grading, no pairwise presentation in this pilot.</a:t>
             </a:r>
           </a:p>
         </p:txBody>
@@ -1722,7 +1723,7 @@
                   <a:srgbClr val="1F3864"/>
                 </a:solidFill>
               </a:rPr>
-              <a:t>User stories for the product team</a:t>
+              <a:t>Operating decisions</a:t>
             </a:r>
           </a:p>
         </p:txBody>
@@ -1779,7 +1780,7 @@
             </a:pPr>
             <a:r>
               <a:rPr sz="1600"/>
-              <a:t>(Write them in Step 22 first.)</a:t>
+              <a:t>(Record the call in Step 20 first.)</a:t>
             </a:r>
           </a:p>
         </p:txBody>
@@ -1811,41 +1812,16 @@
       </p:grpSpPr>
       <p:sp>
         <p:nvSpPr>
-          <p:cNvPr id="2" name="BG"/>
-          <p:cNvSpPr>
-            <a:spLocks noGrp="1"/>
-          </p:cNvSpPr>
-          <p:nvPr/>
-        </p:nvSpPr>
-        <p:spPr>
-          <a:xfrm>
-            <a:off x="0" y="0"/>
-            <a:ext cx="9144000" cy="6858000"/>
-          </a:xfrm>
-          <a:prstGeom prst="rect">
-            <a:avLst/>
-          </a:prstGeom>
-          <a:solidFill>
-            <a:srgbClr val="0F6CBD"/>
-          </a:solidFill>
-        </p:spPr>
-        <p:txBody>
-          <a:bodyPr wrap="square"/>
-          <a:lstStyle/>
-        </p:txBody>
-      </p:sp>
-      <p:sp>
-        <p:nvSpPr>
-          <p:cNvPr id="3" name="SecTitle"/>
-          <p:cNvSpPr>
-            <a:spLocks noGrp="1"/>
-          </p:cNvSpPr>
-          <p:nvPr/>
-        </p:nvSpPr>
-        <p:spPr>
-          <a:xfrm>
-            <a:off x="685800" y="2500000"/>
-            <a:ext cx="7772400" cy="1400000"/>
+          <p:cNvPr id="2" name="Title"/>
+          <p:cNvSpPr>
+            <a:spLocks noGrp="1"/>
+          </p:cNvSpPr>
+          <p:nvPr/>
+        </p:nvSpPr>
+        <p:spPr>
+          <a:xfrm>
+            <a:off x="685800" y="274638"/>
+            <a:ext cx="7772400" cy="800000"/>
           </a:xfrm>
           <a:prstGeom prst="rect">
             <a:avLst/>
@@ -1860,25 +1836,69 @@
               <a:buNone/>
             </a:pPr>
             <a:r>
-              <a:rPr b="1" sz="4000">
+              <a:rPr b="1" sz="2800">
                 <a:solidFill>
-                  <a:srgbClr val="FFFFFF"/>
+                  <a:srgbClr val="1F3864"/>
                 </a:solidFill>
               </a:rPr>
-              <a:t>What we learned</a:t>
-            </a:r>
-          </a:p>
-          <a:p>
-            <a:pPr>
-              <a:buNone/>
-            </a:pPr>
-            <a:r>
-              <a:rPr sz="1800">
-                <a:solidFill>
-                  <a:srgbClr val="FFFFFF"/>
-                </a:solidFill>
-              </a:rPr>
-              <a:t>One through-line per finding: what, evidence, so what, recommendation.</a:t>
+              <a:t>Customer problem statements</a:t>
+            </a:r>
+          </a:p>
+        </p:txBody>
+      </p:sp>
+      <p:sp>
+        <p:nvSpPr>
+          <p:cNvPr id="3" name="Rule"/>
+          <p:cNvSpPr>
+            <a:spLocks noGrp="1"/>
+          </p:cNvSpPr>
+          <p:nvPr/>
+        </p:nvSpPr>
+        <p:spPr>
+          <a:xfrm>
+            <a:off x="685800" y="1130000"/>
+            <a:ext cx="7772400" cy="45000"/>
+          </a:xfrm>
+          <a:prstGeom prst="rect">
+            <a:avLst/>
+          </a:prstGeom>
+          <a:solidFill>
+            <a:srgbClr val="2E75B6"/>
+          </a:solidFill>
+        </p:spPr>
+        <p:txBody>
+          <a:bodyPr wrap="square"/>
+          <a:lstStyle/>
+        </p:txBody>
+      </p:sp>
+      <p:sp>
+        <p:nvSpPr>
+          <p:cNvPr id="4" name="Content"/>
+          <p:cNvSpPr>
+            <a:spLocks noGrp="1"/>
+          </p:cNvSpPr>
+          <p:nvPr/>
+        </p:nvSpPr>
+        <p:spPr>
+          <a:xfrm>
+            <a:off x="685800" y="1350000"/>
+            <a:ext cx="7772400" cy="5000000"/>
+          </a:xfrm>
+          <a:prstGeom prst="rect">
+            <a:avLst/>
+          </a:prstGeom>
+          <a:noFill/>
+        </p:spPr>
+        <p:txBody>
+          <a:bodyPr wrap="square"/>
+          <a:lstStyle/>
+          <a:p>
+            <a:pPr>
+              <a:buChar char="•"/>
+            </a:pPr>
+            <a:r>
+              <a:rPr sz="1600"/>
+              <a:t>(Write them in Step 22 first.)</a:t>
             </a:r>
           </a:p>
         </p:txBody>
@@ -1939,7 +1959,7 @@
                   <a:srgbClr val="1F3864"/>
                 </a:solidFill>
               </a:rPr>
-              <a:t>descriptive_accuracy: ready to trust</a:t>
+              <a:t>User stories for the product team</a:t>
             </a:r>
           </a:p>
         </p:txBody>
@@ -1996,25 +2016,7 @@
             </a:pPr>
             <a:r>
               <a:rPr sz="1600"/>
-              <a:t>Evidence: Both AI judges agreed with the human expert well beyond chance (Judge A 0.71, Judge B 0.84; bar 0.60) across 12 inputs.</a:t>
-            </a:r>
-          </a:p>
-          <a:p>
-            <a:pPr>
-              <a:buChar char="•"/>
-            </a:pPr>
-            <a:r>
-              <a:rPr sz="1600"/>
-              <a:t>So what: Scores on descriptive_accuracy can stand in for human review. The alt text correctly describes what is actually visible: objects, setting, and the salient visual details a sighted person would notice.</a:t>
-            </a:r>
-          </a:p>
-          <a:p>
-            <a:pPr>
-              <a:buChar char="•"/>
-            </a:pPr>
-            <a:r>
-              <a:rPr b="1" sz="1600"/>
-              <a:t>Recommendation (Product): Use either judge for descriptive_accuracy QA on new outputs; prefer Judge B (0.84) for ongoing monitoring.</a:t>
+              <a:t>(Write them in Step 22 first.)</a:t>
             </a:r>
           </a:p>
         </p:txBody>
@@ -2145,16 +2147,41 @@
       </p:grpSpPr>
       <p:sp>
         <p:nvSpPr>
-          <p:cNvPr id="2" name="Title"/>
-          <p:cNvSpPr>
-            <a:spLocks noGrp="1"/>
-          </p:cNvSpPr>
-          <p:nvPr/>
-        </p:nvSpPr>
-        <p:spPr>
-          <a:xfrm>
-            <a:off x="685800" y="274638"/>
-            <a:ext cx="7772400" cy="800000"/>
+          <p:cNvPr id="2" name="BG"/>
+          <p:cNvSpPr>
+            <a:spLocks noGrp="1"/>
+          </p:cNvSpPr>
+          <p:nvPr/>
+        </p:nvSpPr>
+        <p:spPr>
+          <a:xfrm>
+            <a:off x="0" y="0"/>
+            <a:ext cx="9144000" cy="6858000"/>
+          </a:xfrm>
+          <a:prstGeom prst="rect">
+            <a:avLst/>
+          </a:prstGeom>
+          <a:solidFill>
+            <a:srgbClr val="0F6CBD"/>
+          </a:solidFill>
+        </p:spPr>
+        <p:txBody>
+          <a:bodyPr wrap="square"/>
+          <a:lstStyle/>
+        </p:txBody>
+      </p:sp>
+      <p:sp>
+        <p:nvSpPr>
+          <p:cNvPr id="3" name="SecTitle"/>
+          <p:cNvSpPr>
+            <a:spLocks noGrp="1"/>
+          </p:cNvSpPr>
+          <p:nvPr/>
+        </p:nvSpPr>
+        <p:spPr>
+          <a:xfrm>
+            <a:off x="685800" y="2500000"/>
+            <a:ext cx="7772400" cy="1400000"/>
           </a:xfrm>
           <a:prstGeom prst="rect">
             <a:avLst/>
@@ -2169,87 +2196,25 @@
               <a:buNone/>
             </a:pPr>
             <a:r>
-              <a:rPr b="1" sz="2800">
+              <a:rPr b="1" sz="4000">
                 <a:solidFill>
-                  <a:srgbClr val="1F3864"/>
+                  <a:srgbClr val="FFFFFF"/>
                 </a:solidFill>
               </a:rPr>
-              <a:t>functional_usefulness: ready to trust</a:t>
-            </a:r>
-          </a:p>
-        </p:txBody>
-      </p:sp>
-      <p:sp>
-        <p:nvSpPr>
-          <p:cNvPr id="3" name="Rule"/>
-          <p:cNvSpPr>
-            <a:spLocks noGrp="1"/>
-          </p:cNvSpPr>
-          <p:nvPr/>
-        </p:nvSpPr>
-        <p:spPr>
-          <a:xfrm>
-            <a:off x="685800" y="1130000"/>
-            <a:ext cx="7772400" cy="45000"/>
-          </a:xfrm>
-          <a:prstGeom prst="rect">
-            <a:avLst/>
-          </a:prstGeom>
-          <a:solidFill>
-            <a:srgbClr val="2E75B6"/>
-          </a:solidFill>
-        </p:spPr>
-        <p:txBody>
-          <a:bodyPr wrap="square"/>
-          <a:lstStyle/>
-        </p:txBody>
-      </p:sp>
-      <p:sp>
-        <p:nvSpPr>
-          <p:cNvPr id="4" name="Content"/>
-          <p:cNvSpPr>
-            <a:spLocks noGrp="1"/>
-          </p:cNvSpPr>
-          <p:nvPr/>
-        </p:nvSpPr>
-        <p:spPr>
-          <a:xfrm>
-            <a:off x="685800" y="1350000"/>
-            <a:ext cx="7772400" cy="5000000"/>
-          </a:xfrm>
-          <a:prstGeom prst="rect">
-            <a:avLst/>
-          </a:prstGeom>
-          <a:noFill/>
-        </p:spPr>
-        <p:txBody>
-          <a:bodyPr wrap="square"/>
-          <a:lstStyle/>
-          <a:p>
-            <a:pPr>
-              <a:buChar char="•"/>
-            </a:pPr>
-            <a:r>
-              <a:rPr sz="1600"/>
-              <a:t>Evidence: Both AI judges agreed with the human expert well beyond chance (Judge A 1.00, Judge B 0.64; bar 0.60) across 12 inputs.</a:t>
-            </a:r>
-          </a:p>
-          <a:p>
-            <a:pPr>
-              <a:buChar char="•"/>
-            </a:pPr>
-            <a:r>
-              <a:rPr sz="1600"/>
-              <a:t>So what: Scores on functional_usefulness can stand in for human review. The alt text serves the listener's actual need in context: a PowerPoint audience member on a screen reader learns what the image is doing on the slide, not just what it looks like.</a:t>
-            </a:r>
-          </a:p>
-          <a:p>
-            <a:pPr>
-              <a:buChar char="•"/>
-            </a:pPr>
-            <a:r>
-              <a:rPr b="1" sz="1600"/>
-              <a:t>Recommendation (Product): Use either judge for functional_usefulness QA on new outputs; prefer Judge A (1.00) for ongoing monitoring.</a:t>
+              <a:t>What we learned</a:t>
+            </a:r>
+          </a:p>
+          <a:p>
+            <a:pPr>
+              <a:buNone/>
+            </a:pPr>
+            <a:r>
+              <a:rPr sz="1800">
+                <a:solidFill>
+                  <a:srgbClr val="FFFFFF"/>
+                </a:solidFill>
+              </a:rPr>
+              <a:t>One through-line per finding: what, evidence, so what, recommendation.</a:t>
             </a:r>
           </a:p>
         </p:txBody>
@@ -2310,7 +2275,7 @@
                   <a:srgbClr val="1F3864"/>
                 </a:solidFill>
               </a:rPr>
-              <a:t>concision: HOLD — Judge B (0.44) below the bar</a:t>
+              <a:t>descriptive_accuracy: ready to trust</a:t>
             </a:r>
           </a:p>
         </p:txBody>
@@ -2367,16 +2332,16 @@
             </a:pPr>
             <a:r>
               <a:rPr sz="1600"/>
-              <a:t>Evidence: Judge B agreed with the human expert at 0.44, below the 0.60 bar. Bias checks: Judge B shows verbosity bias (Generous to long outputs: scored 2 vs human 0 on INPUT-11 concision (~210 chars); 2 vs 1 on INPUT-09. Do not trust Judge B on concision until re-prompted.) A judge below the bar does not…</a:t>
-            </a:r>
-          </a:p>
-          <a:p>
-            <a:pPr>
-              <a:buChar char="•"/>
-            </a:pPr>
-            <a:r>
-              <a:rPr sz="1600"/>
-              <a:t>So what: Scores from a below-bar judge look precise but do not reflect expert judgment. Using them for QA or launch decisions would bless outputs a human would reject.</a:t>
+              <a:t>Evidence: Both AI judges agreed with the human expert well beyond chance (Judge A 0.71, Judge B 0.84; bar 0.60) across 12 inputs.</a:t>
+            </a:r>
+          </a:p>
+          <a:p>
+            <a:pPr>
+              <a:buChar char="•"/>
+            </a:pPr>
+            <a:r>
+              <a:rPr sz="1600"/>
+              <a:t>So what: Scores on descriptive_accuracy can stand in for human review. The alt text correctly describes what is actually visible: objects, setting, and the salient visual details a sighted person would notice.</a:t>
             </a:r>
           </a:p>
           <a:p>
@@ -2385,7 +2350,7 @@
             </a:pPr>
             <a:r>
               <a:rPr b="1" sz="1600"/>
-              <a:t>Recommendation (Applied science): Do not use Judge B for concision. Judge A clears the bar (1.00) — use it alone. Address the bias, re-prompt, and re-run agreement.</a:t>
+              <a:t>Recommendation (Product): Use either judge for descriptive_accuracy QA on new outputs; prefer Judge B (0.84) for ongoing monitoring.</a:t>
             </a:r>
           </a:p>
         </p:txBody>
@@ -2446,7 +2411,7 @@
                   <a:srgbClr val="1F3864"/>
                 </a:solidFill>
               </a:rPr>
-              <a:t>42% of outputs earned top marks on descriptive_accuracy</a:t>
+              <a:t>functional_usefulness: ready to trust</a:t>
             </a:r>
           </a:p>
         </p:txBody>
@@ -2503,16 +2468,16 @@
             </a:pPr>
             <a:r>
               <a:rPr sz="1600"/>
-              <a:t>Evidence: Human-graded 12 outputs: 5 scored 2, 6 scored 1, 1 scored 0. Most failures are partial credit — broadly correct but misses a salient detail, or one minor inaccuracy. A missed salient detail caps accuracy at 1. 3 adjudications on descriptive_accuracy: Judge A scored the words; the money detail (sun…</a:t>
-            </a:r>
-          </a:p>
-          <a:p>
-            <a:pPr>
-              <a:buChar char="•"/>
-            </a:pPr>
-            <a:r>
-              <a:rPr sz="1600"/>
-              <a:t>So what: Falling short of “All salient elements named correctly; nothing invented. A listener could picture the scene.” on 7 of 12 outputs. 1 of the failures are high-risk inputs. If this ships as-is, 58% of outputs fall short of the bar the team set.</a:t>
+              <a:t>Evidence: Both AI judges agreed with the human expert well beyond chance (Judge A 1.00, Judge B 0.64; bar 0.60) across 12 inputs.</a:t>
+            </a:r>
+          </a:p>
+          <a:p>
+            <a:pPr>
+              <a:buChar char="•"/>
+            </a:pPr>
+            <a:r>
+              <a:rPr sz="1600"/>
+              <a:t>So what: Scores on functional_usefulness can stand in for human review. The alt text serves the listener's actual need in context: a PowerPoint audience member on a screen reader learns what the image is doing on the slide, not just what it looks like.</a:t>
             </a:r>
           </a:p>
           <a:p>
@@ -2521,7 +2486,7 @@
             </a:pPr>
             <a:r>
               <a:rPr b="1" sz="1600"/>
-              <a:t>Recommendation (Product): Open the grade explorer filtered to descriptive_accuracy below 2 (INPUT-01, INPUT-02, INPUT-03, INPUT-05, INPUT-10, …). How might we get outputs to consistently all salient elements named correctly; nothing invented. A listener could picture the scene.? Check the trace on INPUT-03, INPUT-11 to see…</a:t>
+              <a:t>Recommendation (Product): Use either judge for functional_usefulness QA on new outputs; prefer Judge A (1.00) for ongoing monitoring.</a:t>
             </a:r>
           </a:p>
         </p:txBody>
@@ -2582,7 +2547,7 @@
                   <a:srgbClr val="1F3864"/>
                 </a:solidFill>
               </a:rPr>
-              <a:t>0% of outputs earned top marks on functional_usefulness</a:t>
+              <a:t>concision: HOLD — Judge B (0.44) below the bar</a:t>
             </a:r>
           </a:p>
         </p:txBody>
@@ -2639,16 +2604,16 @@
             </a:pPr>
             <a:r>
               <a:rPr sz="1600"/>
-              <a:t>Evidence: Human-graded 12 outputs: 0 scored 2, 11 scored 1, 1 scored 0. Most failures are partial credit — describes content accurately but gives no functional framing. 1 adjudication on functional_usefulness: Judge B was right: 'styled workspace photography' does signal the slide's remote-work theme.…</a:t>
-            </a:r>
-          </a:p>
-          <a:p>
-            <a:pPr>
-              <a:buChar char="•"/>
-            </a:pPr>
-            <a:r>
-              <a:rPr sz="1600"/>
-              <a:t>So what: Falling short of “Conveys both content and function: why this image is on this slide.” on 12 of 12 outputs. 2 of the failures are high-risk inputs. If this ships as-is, 100% of outputs fall short of the bar the team set.</a:t>
+              <a:t>Evidence: Judge B agreed with the human expert at 0.44, below the 0.60 bar. Bias checks: Judge B shows verbosity bias (Generous to long outputs: scored 2 vs human 0 on INPUT-11 concision (~210 chars); 2 vs 1 on INPUT-09. Do not trust Judge B on concision until re-prompted.) A judge below the bar does not…</a:t>
+            </a:r>
+          </a:p>
+          <a:p>
+            <a:pPr>
+              <a:buChar char="•"/>
+            </a:pPr>
+            <a:r>
+              <a:rPr sz="1600"/>
+              <a:t>So what: Scores from a below-bar judge look precise but do not reflect expert judgment. Using them for QA or launch decisions would bless outputs a human would reject.</a:t>
             </a:r>
           </a:p>
           <a:p>
@@ -2657,7 +2622,7 @@
             </a:pPr>
             <a:r>
               <a:rPr b="1" sz="1600"/>
-              <a:t>Recommendation (Product): Open the grade explorer filtered to functional_usefulness below 2 (INPUT-01, INPUT-02, INPUT-03, INPUT-04, INPUT-05, …). How might we get outputs to consistently conveys both content and function: why this image is on this slide.? Check the trace on INPUT-03, INPUT-11 to see whether the breakdown…</a:t>
+              <a:t>Recommendation (Applied science): Do not use Judge B for concision. Judge A clears the bar (1.00) — use it alone. Address the bias, re-prompt, and re-run agreement.</a:t>
             </a:r>
           </a:p>
         </p:txBody>
@@ -2718,7 +2683,7 @@
                   <a:srgbClr val="1F3864"/>
                 </a:solidFill>
               </a:rPr>
-              <a:t>75% of outputs earned top marks on concision</a:t>
+              <a:t>42% of outputs earned top marks on descriptive_accuracy</a:t>
             </a:r>
           </a:p>
         </p:txBody>
@@ -2775,16 +2740,16 @@
             </a:pPr>
             <a:r>
               <a:rPr sz="1600"/>
-              <a:t>Evidence: Human-graded 12 outputs: 9 scored 2, 2 scored 1, 1 scored 0. Most failures are partial credit — 125-200 characters, or one filler phrase; still listenable. 2 adjudications on concision: Judge B scored a filler-opening output 2 on concision. Second data point for the verbosity-bias note. Judge B…</a:t>
-            </a:r>
-          </a:p>
-          <a:p>
-            <a:pPr>
-              <a:buChar char="•"/>
-            </a:pPr>
-            <a:r>
-              <a:rPr sz="1600"/>
-              <a:t>So what: Falling short of “About 125 characters or fewer, no filler; nothing a listener would want cut.” on 3 of 12 outputs. If this ships as-is, 25% of outputs fall short of the bar the team set.</a:t>
+              <a:t>Evidence: Human-graded 12 outputs: 5 scored 2, 6 scored 1, 1 scored 0. Most failures are partial credit — broadly correct but misses a salient detail, or one minor inaccuracy. A missed salient detail caps accuracy at 1. 3 adjudications on descriptive_accuracy: Judge A scored the words; the money detail (sun…</a:t>
+            </a:r>
+          </a:p>
+          <a:p>
+            <a:pPr>
+              <a:buChar char="•"/>
+            </a:pPr>
+            <a:r>
+              <a:rPr sz="1600"/>
+              <a:t>So what: Falling short of “All salient elements named correctly; nothing invented. A listener could picture the scene.” on 7 of 12 outputs. 1 of the failures are high-risk inputs. If this ships as-is, 58% of outputs fall short of the bar the team set.</a:t>
             </a:r>
           </a:p>
           <a:p>
@@ -2793,7 +2758,7 @@
             </a:pPr>
             <a:r>
               <a:rPr b="1" sz="1600"/>
-              <a:t>Recommendation (Product): Open the grade explorer filtered to concision below 2 (INPUT-02, INPUT-09, INPUT-11). How might we get outputs to consistently about 125 characters or fewer, no filler; nothing a listener would want cut.? Check the trace on INPUT-11 to see whether the breakdown is in the model output, a tool call,…</a:t>
+              <a:t>Recommendation (Product): Open the grade explorer filtered to descriptive_accuracy below 2 (INPUT-01, INPUT-02, INPUT-03, INPUT-05, INPUT-10, …). How might we get outputs to consistently all salient elements named correctly; nothing invented. A listener could picture the scene.? Check the trace on INPUT-03, INPUT-11 to see…</a:t>
             </a:r>
           </a:p>
         </p:txBody>
@@ -2854,7 +2819,7 @@
                   <a:srgbClr val="1F3864"/>
                 </a:solidFill>
               </a:rPr>
-              <a:t>Recommended actions</a:t>
+              <a:t>0% of outputs earned top marks on functional_usefulness</a:t>
             </a:r>
           </a:p>
         </p:txBody>
@@ -2910,143 +2875,26 @@
               <a:buChar char="•"/>
             </a:pPr>
             <a:r>
+              <a:rPr sz="1600"/>
+              <a:t>Evidence: Human-graded 12 outputs: 0 scored 2, 11 scored 1, 1 scored 0. Most failures are partial credit — describes content accurately but gives no functional framing. 1 adjudication on functional_usefulness: Judge B was right: 'styled workspace photography' does signal the slide's remote-work theme.…</a:t>
+            </a:r>
+          </a:p>
+          <a:p>
+            <a:pPr>
+              <a:buChar char="•"/>
+            </a:pPr>
+            <a:r>
+              <a:rPr sz="1600"/>
+              <a:t>So what: Falling short of “Conveys both content and function: why this image is on this slide.” on 12 of 12 outputs. 2 of the failures are high-risk inputs. If this ships as-is, 100% of outputs fall short of the bar the team set.</a:t>
+            </a:r>
+          </a:p>
+          <a:p>
+            <a:pPr>
+              <a:buChar char="•"/>
+            </a:pPr>
+            <a:r>
               <a:rPr b="1" sz="1600"/>
-              <a:t>[UXR] Grow past the 12-input pilot before making launch decisions.</a:t>
-            </a:r>
-          </a:p>
-          <a:p>
-            <a:pPr>
-              <a:buChar char="•"/>
-            </a:pPr>
-            <a:r>
-              <a:rPr b="1" sz="1600"/>
-              <a:t>[Product] Use either judge for descriptive_accuracy QA on new outputs; prefer Judge B (0.84) for ongoing monitoring.</a:t>
-            </a:r>
-          </a:p>
-          <a:p>
-            <a:pPr>
-              <a:buChar char="•"/>
-            </a:pPr>
-            <a:r>
-              <a:rPr b="1" sz="1600"/>
-              <a:t>[Product] Open the grade explorer filtered to descriptive_accuracy below 2 (INPUT-01, INPUT-02, INPUT-03, INPUT-05, INPUT-10, …). How might we get outputs to consistently all salient elements named correctly; nothing invented. A listener could picture the scene.? Check the trace on INPUT-03, INPUT-11 to see whether the breakdown is in the model output, a tool call, or the harness. Log the trace for every input next round: a failure you cannot diagnose is a number, not a finding.</a:t>
-            </a:r>
-          </a:p>
-          <a:p>
-            <a:pPr>
-              <a:buChar char="•"/>
-            </a:pPr>
-            <a:r>
-              <a:rPr b="1" sz="1600"/>
-              <a:t>[Product] Use either judge for functional_usefulness QA on new outputs; prefer Judge A (1.00) for ongoing monitoring.</a:t>
-            </a:r>
-          </a:p>
-          <a:p>
-            <a:pPr>
-              <a:buChar char="•"/>
-            </a:pPr>
-            <a:r>
-              <a:rPr b="1" sz="1600"/>
-              <a:t>[Product] Open the grade explorer filtered to functional_usefulness below 2 (INPUT-01, INPUT-02, INPUT-03, INPUT-04, INPUT-05, …). How might we get outputs to consistently conveys both content and function: why this image is on this slide.? Check the trace on INPUT-03, INPUT-11 to see whether the breakdown is in the model output, a tool call, or the harness. Log the trace for every input next round: a failure you cannot diagnose is a number, not a finding.</a:t>
-            </a:r>
-          </a:p>
-          <a:p>
-            <a:pPr>
-              <a:buChar char="•"/>
-            </a:pPr>
-            <a:r>
-              <a:rPr b="1" sz="1600"/>
-              <a:t>[Applied science] Do not use Judge B for concision. Judge A clears the bar (1.00) — use it alone. Address the bias, re-prompt, and re-run agreement.</a:t>
-            </a:r>
-          </a:p>
-          <a:p>
-            <a:pPr>
-              <a:buChar char="•"/>
-            </a:pPr>
-            <a:r>
-              <a:rPr b="1" sz="1600"/>
-              <a:t>[Product] Open the grade explorer filtered to concision below 2 (INPUT-02, INPUT-09, INPUT-11). How might we get outputs to consistently about 125 characters or fewer, no filler; nothing a listener would want cut.? Check the trace on INPUT-11 to see whether the breakdown is in the model output, a tool call, or the harness. Log the trace for every input next round: a failure you cannot diagnose is a number, not a finding.</a:t>
-            </a:r>
-          </a:p>
-          <a:p>
-            <a:pPr>
-              <a:buChar char="•"/>
-            </a:pPr>
-            <a:r>
-              <a:rPr b="1" sz="1600"/>
-              <a:t>[Product] Decide: product work on this slice, or wider coverage to confirm the signal.</a:t>
-            </a:r>
-          </a:p>
-          <a:p>
-            <a:pPr>
-              <a:buChar char="•"/>
-            </a:pPr>
-            <a:r>
-              <a:rPr b="1" sz="1600"/>
-              <a:t>[Product] Decide: product work on this slice, or wider coverage to confirm the signal.</a:t>
-            </a:r>
-          </a:p>
-          <a:p>
-            <a:pPr>
-              <a:buChar char="•"/>
-            </a:pPr>
-            <a:r>
-              <a:rPr b="1" sz="1600"/>
-              <a:t>[UXR] Work the queue top-down; each row opens the adjudication form pre-filled.</a:t>
-            </a:r>
-          </a:p>
-          <a:p>
-            <a:pPr>
-              <a:buChar char="•"/>
-            </a:pPr>
-            <a:r>
-              <a:rPr b="1" sz="1600"/>
-              <a:t>[UXR] After any rubric change, re-grade affected items and re-run agreement before comparing across versions.</a:t>
-            </a:r>
-          </a:p>
-          <a:p>
-            <a:pPr>
-              <a:buChar char="•"/>
-            </a:pPr>
-            <a:r>
-              <a:rPr b="1" sz="1600"/>
-              <a:t>[Applied science] Account for verbosity bias in Judge B before using it at scale: re-prompt, calibrate, or exclude it on affected constructs.</a:t>
-            </a:r>
-          </a:p>
-          <a:p>
-            <a:pPr>
-              <a:buChar char="•"/>
-            </a:pPr>
-            <a:r>
-              <a:rPr b="1" sz="1600"/>
-              <a:t>[Applied science] Account for position bias in Judge A before using it at scale: re-prompt, calibrate, or exclude it on affected constructs.</a:t>
-            </a:r>
-          </a:p>
-          <a:p>
-            <a:pPr>
-              <a:buChar char="•"/>
-            </a:pPr>
-            <a:r>
-              <a:rPr b="1" sz="1600"/>
-              <a:t>[UXR] Re-grade items affected by the change and re-run agreement before comparing across versions.</a:t>
-            </a:r>
-          </a:p>
-          <a:p>
-            <a:pPr>
-              <a:buChar char="•"/>
-            </a:pPr>
-            <a:r>
-              <a:rPr b="1" sz="1600"/>
-              <a:t>[Team] Add the v2 anchor (a missed salient detail caps accuracy at 1) before grading, and re-prompt Judge B on concision.</a:t>
-            </a:r>
-          </a:p>
-          <a:p>
-            <a:pPr>
-              <a:buChar char="•"/>
-            </a:pPr>
-            <a:r>
-              <a:rPr b="1" sz="1600"/>
-              <a:t>[Exec] Do not extend automated grading beyond: The team can trust Judge A for alt-text QA on standard-risk images. Do not trust Judge B on concision until re-prompted.</a:t>
+              <a:t>Recommendation (Product): Open the grade explorer filtered to functional_usefulness below 2 (INPUT-01, INPUT-02, INPUT-03, INPUT-04, INPUT-05, …). How might we get outputs to consistently conveys both content and function: why this image is on this slide.? Check the trace on INPUT-03, INPUT-11 to see whether the breakdown…</a:t>
             </a:r>
           </a:p>
         </p:txBody>
@@ -3078,41 +2926,16 @@
       </p:grpSpPr>
       <p:sp>
         <p:nvSpPr>
-          <p:cNvPr id="2" name="BG"/>
-          <p:cNvSpPr>
-            <a:spLocks noGrp="1"/>
-          </p:cNvSpPr>
-          <p:nvPr/>
-        </p:nvSpPr>
-        <p:spPr>
-          <a:xfrm>
-            <a:off x="0" y="0"/>
-            <a:ext cx="9144000" cy="6858000"/>
-          </a:xfrm>
-          <a:prstGeom prst="rect">
-            <a:avLst/>
-          </a:prstGeom>
-          <a:solidFill>
-            <a:srgbClr val="0F6CBD"/>
-          </a:solidFill>
-        </p:spPr>
-        <p:txBody>
-          <a:bodyPr wrap="square"/>
-          <a:lstStyle/>
-        </p:txBody>
-      </p:sp>
-      <p:sp>
-        <p:nvSpPr>
-          <p:cNvPr id="3" name="SecTitle"/>
-          <p:cNvSpPr>
-            <a:spLocks noGrp="1"/>
-          </p:cNvSpPr>
-          <p:nvPr/>
-        </p:nvSpPr>
-        <p:spPr>
-          <a:xfrm>
-            <a:off x="685800" y="2500000"/>
-            <a:ext cx="7772400" cy="1400000"/>
+          <p:cNvPr id="2" name="Title"/>
+          <p:cNvSpPr>
+            <a:spLocks noGrp="1"/>
+          </p:cNvSpPr>
+          <p:nvPr/>
+        </p:nvSpPr>
+        <p:spPr>
+          <a:xfrm>
+            <a:off x="685800" y="274638"/>
+            <a:ext cx="7772400" cy="800000"/>
           </a:xfrm>
           <a:prstGeom prst="rect">
             <a:avLst/>
@@ -3127,25 +2950,87 @@
               <a:buNone/>
             </a:pPr>
             <a:r>
-              <a:rPr b="1" sz="4000">
+              <a:rPr b="1" sz="2800">
                 <a:solidFill>
-                  <a:srgbClr val="FFFFFF"/>
+                  <a:srgbClr val="1F3864"/>
                 </a:solidFill>
               </a:rPr>
-              <a:t>Appendix</a:t>
-            </a:r>
-          </a:p>
-          <a:p>
-            <a:pPr>
-              <a:buNone/>
-            </a:pPr>
-            <a:r>
-              <a:rPr sz="1800">
-                <a:solidFill>
-                  <a:srgbClr val="FFFFFF"/>
-                </a:solidFill>
-              </a:rPr>
-              <a:t>For the record.</a:t>
+              <a:t>75% of outputs earned top marks on concision</a:t>
+            </a:r>
+          </a:p>
+        </p:txBody>
+      </p:sp>
+      <p:sp>
+        <p:nvSpPr>
+          <p:cNvPr id="3" name="Rule"/>
+          <p:cNvSpPr>
+            <a:spLocks noGrp="1"/>
+          </p:cNvSpPr>
+          <p:nvPr/>
+        </p:nvSpPr>
+        <p:spPr>
+          <a:xfrm>
+            <a:off x="685800" y="1130000"/>
+            <a:ext cx="7772400" cy="45000"/>
+          </a:xfrm>
+          <a:prstGeom prst="rect">
+            <a:avLst/>
+          </a:prstGeom>
+          <a:solidFill>
+            <a:srgbClr val="2E75B6"/>
+          </a:solidFill>
+        </p:spPr>
+        <p:txBody>
+          <a:bodyPr wrap="square"/>
+          <a:lstStyle/>
+        </p:txBody>
+      </p:sp>
+      <p:sp>
+        <p:nvSpPr>
+          <p:cNvPr id="4" name="Content"/>
+          <p:cNvSpPr>
+            <a:spLocks noGrp="1"/>
+          </p:cNvSpPr>
+          <p:nvPr/>
+        </p:nvSpPr>
+        <p:spPr>
+          <a:xfrm>
+            <a:off x="685800" y="1350000"/>
+            <a:ext cx="7772400" cy="5000000"/>
+          </a:xfrm>
+          <a:prstGeom prst="rect">
+            <a:avLst/>
+          </a:prstGeom>
+          <a:noFill/>
+        </p:spPr>
+        <p:txBody>
+          <a:bodyPr wrap="square"/>
+          <a:lstStyle/>
+          <a:p>
+            <a:pPr>
+              <a:buChar char="•"/>
+            </a:pPr>
+            <a:r>
+              <a:rPr sz="1600"/>
+              <a:t>Evidence: Human-graded 12 outputs: 9 scored 2, 2 scored 1, 1 scored 0. Most failures are partial credit — 125-200 characters, or one filler phrase; still listenable. 2 adjudications on concision: Judge B scored a filler-opening output 2 on concision. Second data point for the verbosity-bias note. Judge B…</a:t>
+            </a:r>
+          </a:p>
+          <a:p>
+            <a:pPr>
+              <a:buChar char="•"/>
+            </a:pPr>
+            <a:r>
+              <a:rPr sz="1600"/>
+              <a:t>So what: Falling short of “About 125 characters or fewer, no filler; nothing a listener would want cut.” on 3 of 12 outputs. If this ships as-is, 25% of outputs fall short of the bar the team set.</a:t>
+            </a:r>
+          </a:p>
+          <a:p>
+            <a:pPr>
+              <a:buChar char="•"/>
+            </a:pPr>
+            <a:r>
+              <a:rPr b="1" sz="1600"/>
+              <a:t>Recommendation (Product): Open the grade explorer filtered to concision below 2 (INPUT-02, INPUT-09, INPUT-11). How might we get outputs to consistently about 125 characters or fewer, no filler; nothing a listener would want cut.? Check the trace on INPUT-11 to see whether the breakdown is in the model output, a tool call,…</a:t>
             </a:r>
           </a:p>
         </p:txBody>
@@ -3206,7 +3091,7 @@
                   <a:srgbClr val="1F3864"/>
                 </a:solidFill>
               </a:rPr>
-              <a:t>How to read this readout</a:t>
+              <a:t>Recommended actions</a:t>
             </a:r>
           </a:p>
         </p:txBody>
@@ -3262,44 +3147,143 @@
               <a:buChar char="•"/>
             </a:pPr>
             <a:r>
-              <a:rPr sz="1600"/>
-              <a:t>SHIP means both AI judges agreed with the human expert past the trust bar: their scores can stand in for human review. HOLD means at least one did not: do not trust that judge on that measure yet.</a:t>
-            </a:r>
-          </a:p>
-          <a:p>
-            <a:pPr>
-              <a:buChar char="•"/>
-            </a:pPr>
-            <a:r>
-              <a:rPr sz="1600"/>
-              <a:t>Kappa measures grader agreement after removing lucky agreement. 1.0 is perfect, 0 is chance. The trust bar is 0.60.</a:t>
-            </a:r>
-          </a:p>
-          <a:p>
-            <a:pPr>
-              <a:buChar char="•"/>
-            </a:pPr>
-            <a:r>
-              <a:rPr sz="1600"/>
-              <a:t>Each finding card follows one through-line: what we found, the evidence, why it matters, and a recommendation with an owner.</a:t>
-            </a:r>
-          </a:p>
-          <a:p>
-            <a:pPr>
-              <a:buChar char="•"/>
-            </a:pPr>
-            <a:r>
-              <a:rPr sz="1600"/>
-              <a:t>Trust scope: The team can trust Judge A for alt-text QA on standard-risk images. Do not trust Judge B on concision until re-prompted.</a:t>
-            </a:r>
-          </a:p>
-          <a:p>
-            <a:pPr>
-              <a:buChar char="•"/>
-            </a:pPr>
-            <a:r>
-              <a:rPr sz="1600"/>
-              <a:t>Full audit trail, grades, and inputs are in the offline package and the dashboard.</a:t>
+              <a:rPr b="1" sz="1600"/>
+              <a:t>[UXR] Grow past the 12-input pilot before making launch decisions.</a:t>
+            </a:r>
+          </a:p>
+          <a:p>
+            <a:pPr>
+              <a:buChar char="•"/>
+            </a:pPr>
+            <a:r>
+              <a:rPr b="1" sz="1600"/>
+              <a:t>[Product] Use either judge for descriptive_accuracy QA on new outputs; prefer Judge B (0.84) for ongoing monitoring.</a:t>
+            </a:r>
+          </a:p>
+          <a:p>
+            <a:pPr>
+              <a:buChar char="•"/>
+            </a:pPr>
+            <a:r>
+              <a:rPr b="1" sz="1600"/>
+              <a:t>[Product] Open the grade explorer filtered to descriptive_accuracy below 2 (INPUT-01, INPUT-02, INPUT-03, INPUT-05, INPUT-10, …). How might we get outputs to consistently all salient elements named correctly; nothing invented. A listener could picture the scene.? Check the trace on INPUT-03, INPUT-11 to see whether the breakdown is in the model output, a tool call, or the harness. Log the trace for every input next round: a failure you cannot diagnose is a number, not a finding.</a:t>
+            </a:r>
+          </a:p>
+          <a:p>
+            <a:pPr>
+              <a:buChar char="•"/>
+            </a:pPr>
+            <a:r>
+              <a:rPr b="1" sz="1600"/>
+              <a:t>[Product] Use either judge for functional_usefulness QA on new outputs; prefer Judge A (1.00) for ongoing monitoring.</a:t>
+            </a:r>
+          </a:p>
+          <a:p>
+            <a:pPr>
+              <a:buChar char="•"/>
+            </a:pPr>
+            <a:r>
+              <a:rPr b="1" sz="1600"/>
+              <a:t>[Product] Open the grade explorer filtered to functional_usefulness below 2 (INPUT-01, INPUT-02, INPUT-03, INPUT-04, INPUT-05, …). How might we get outputs to consistently conveys both content and function: why this image is on this slide.? Check the trace on INPUT-03, INPUT-11 to see whether the breakdown is in the model output, a tool call, or the harness. Log the trace for every input next round: a failure you cannot diagnose is a number, not a finding.</a:t>
+            </a:r>
+          </a:p>
+          <a:p>
+            <a:pPr>
+              <a:buChar char="•"/>
+            </a:pPr>
+            <a:r>
+              <a:rPr b="1" sz="1600"/>
+              <a:t>[Applied science] Do not use Judge B for concision. Judge A clears the bar (1.00) — use it alone. Address the bias, re-prompt, and re-run agreement.</a:t>
+            </a:r>
+          </a:p>
+          <a:p>
+            <a:pPr>
+              <a:buChar char="•"/>
+            </a:pPr>
+            <a:r>
+              <a:rPr b="1" sz="1600"/>
+              <a:t>[Product] Open the grade explorer filtered to concision below 2 (INPUT-02, INPUT-09, INPUT-11). How might we get outputs to consistently about 125 characters or fewer, no filler; nothing a listener would want cut.? Check the trace on INPUT-11 to see whether the breakdown is in the model output, a tool call, or the harness. Log the trace for every input next round: a failure you cannot diagnose is a number, not a finding.</a:t>
+            </a:r>
+          </a:p>
+          <a:p>
+            <a:pPr>
+              <a:buChar char="•"/>
+            </a:pPr>
+            <a:r>
+              <a:rPr b="1" sz="1600"/>
+              <a:t>[Product] Decide: product work on this slice, or wider coverage to confirm the signal.</a:t>
+            </a:r>
+          </a:p>
+          <a:p>
+            <a:pPr>
+              <a:buChar char="•"/>
+            </a:pPr>
+            <a:r>
+              <a:rPr b="1" sz="1600"/>
+              <a:t>[Product] Decide: product work on this slice, or wider coverage to confirm the signal.</a:t>
+            </a:r>
+          </a:p>
+          <a:p>
+            <a:pPr>
+              <a:buChar char="•"/>
+            </a:pPr>
+            <a:r>
+              <a:rPr b="1" sz="1600"/>
+              <a:t>[UXR] Work the queue top-down; each row opens the adjudication form pre-filled.</a:t>
+            </a:r>
+          </a:p>
+          <a:p>
+            <a:pPr>
+              <a:buChar char="•"/>
+            </a:pPr>
+            <a:r>
+              <a:rPr b="1" sz="1600"/>
+              <a:t>[UXR] After any rubric change, re-grade affected items and re-run agreement before comparing across versions.</a:t>
+            </a:r>
+          </a:p>
+          <a:p>
+            <a:pPr>
+              <a:buChar char="•"/>
+            </a:pPr>
+            <a:r>
+              <a:rPr b="1" sz="1600"/>
+              <a:t>[Applied science] Account for verbosity bias in Judge B before using it at scale: re-prompt, calibrate, or exclude it on affected constructs.</a:t>
+            </a:r>
+          </a:p>
+          <a:p>
+            <a:pPr>
+              <a:buChar char="•"/>
+            </a:pPr>
+            <a:r>
+              <a:rPr b="1" sz="1600"/>
+              <a:t>[Applied science] Account for position bias in Judge A before using it at scale: re-prompt, calibrate, or exclude it on affected constructs.</a:t>
+            </a:r>
+          </a:p>
+          <a:p>
+            <a:pPr>
+              <a:buChar char="•"/>
+            </a:pPr>
+            <a:r>
+              <a:rPr b="1" sz="1600"/>
+              <a:t>[UXR] Re-grade items affected by the change and re-run agreement before comparing across versions.</a:t>
+            </a:r>
+          </a:p>
+          <a:p>
+            <a:pPr>
+              <a:buChar char="•"/>
+            </a:pPr>
+            <a:r>
+              <a:rPr b="1" sz="1600"/>
+              <a:t>[Team] Add the v2 anchor (a missed salient detail caps accuracy at 1) before grading, and re-prompt Judge B on concision.</a:t>
+            </a:r>
+          </a:p>
+          <a:p>
+            <a:pPr>
+              <a:buChar char="•"/>
+            </a:pPr>
+            <a:r>
+              <a:rPr b="1" sz="1600"/>
+              <a:t>[Exec] Do not extend automated grading beyond: The team can trust Judge A for alt-text QA on standard-risk images. Do not trust Judge B on concision until re-prompted.</a:t>
             </a:r>
           </a:p>
         </p:txBody>
@@ -3331,16 +3315,41 @@
       </p:grpSpPr>
       <p:sp>
         <p:nvSpPr>
-          <p:cNvPr id="2" name="Title"/>
-          <p:cNvSpPr>
-            <a:spLocks noGrp="1"/>
-          </p:cNvSpPr>
-          <p:nvPr/>
-        </p:nvSpPr>
-        <p:spPr>
-          <a:xfrm>
-            <a:off x="685800" y="274638"/>
-            <a:ext cx="7772400" cy="800000"/>
+          <p:cNvPr id="2" name="BG"/>
+          <p:cNvSpPr>
+            <a:spLocks noGrp="1"/>
+          </p:cNvSpPr>
+          <p:nvPr/>
+        </p:nvSpPr>
+        <p:spPr>
+          <a:xfrm>
+            <a:off x="0" y="0"/>
+            <a:ext cx="9144000" cy="6858000"/>
+          </a:xfrm>
+          <a:prstGeom prst="rect">
+            <a:avLst/>
+          </a:prstGeom>
+          <a:solidFill>
+            <a:srgbClr val="0F6CBD"/>
+          </a:solidFill>
+        </p:spPr>
+        <p:txBody>
+          <a:bodyPr wrap="square"/>
+          <a:lstStyle/>
+        </p:txBody>
+      </p:sp>
+      <p:sp>
+        <p:nvSpPr>
+          <p:cNvPr id="3" name="SecTitle"/>
+          <p:cNvSpPr>
+            <a:spLocks noGrp="1"/>
+          </p:cNvSpPr>
+          <p:nvPr/>
+        </p:nvSpPr>
+        <p:spPr>
+          <a:xfrm>
+            <a:off x="685800" y="2500000"/>
+            <a:ext cx="7772400" cy="1400000"/>
           </a:xfrm>
           <a:prstGeom prst="rect">
             <a:avLst/>
@@ -3355,132 +3364,25 @@
               <a:buNone/>
             </a:pPr>
             <a:r>
-              <a:rPr b="1" sz="2800">
+              <a:rPr b="1" sz="4000">
                 <a:solidFill>
-                  <a:srgbClr val="1F3864"/>
+                  <a:srgbClr val="FFFFFF"/>
                 </a:solidFill>
               </a:rPr>
-              <a:t>Audit trail (mode log)</a:t>
-            </a:r>
-          </a:p>
-        </p:txBody>
-      </p:sp>
-      <p:sp>
-        <p:nvSpPr>
-          <p:cNvPr id="3" name="Rule"/>
-          <p:cNvSpPr>
-            <a:spLocks noGrp="1"/>
-          </p:cNvSpPr>
-          <p:nvPr/>
-        </p:nvSpPr>
-        <p:spPr>
-          <a:xfrm>
-            <a:off x="685800" y="1130000"/>
-            <a:ext cx="7772400" cy="45000"/>
-          </a:xfrm>
-          <a:prstGeom prst="rect">
-            <a:avLst/>
-          </a:prstGeom>
-          <a:solidFill>
-            <a:srgbClr val="2E75B6"/>
-          </a:solidFill>
-        </p:spPr>
-        <p:txBody>
-          <a:bodyPr wrap="square"/>
-          <a:lstStyle/>
-        </p:txBody>
-      </p:sp>
-      <p:sp>
-        <p:nvSpPr>
-          <p:cNvPr id="4" name="Content"/>
-          <p:cNvSpPr>
-            <a:spLocks noGrp="1"/>
-          </p:cNvSpPr>
-          <p:nvPr/>
-        </p:nvSpPr>
-        <p:spPr>
-          <a:xfrm>
-            <a:off x="685800" y="1350000"/>
-            <a:ext cx="7772400" cy="5000000"/>
-          </a:xfrm>
-          <a:prstGeom prst="rect">
-            <a:avLst/>
-          </a:prstGeom>
-          <a:noFill/>
-        </p:spPr>
-        <p:txBody>
-          <a:bodyPr wrap="square"/>
-          <a:lstStyle/>
-          <a:p>
-            <a:pPr>
-              <a:buChar char="•"/>
-            </a:pPr>
-            <a:r>
-              <a:rPr sz="1600"/>
-              <a:t>2026-10-02 · Step Step 14: adjudication verdict (Human-only)</a:t>
-            </a:r>
-          </a:p>
-          <a:p>
-            <a:pPr>
-              <a:buChar char="•"/>
-            </a:pPr>
-            <a:r>
-              <a:rPr sz="1600"/>
-              <a:t>2026-10-02 · Step Step 15: rubric v3 (Human-only)</a:t>
-            </a:r>
-          </a:p>
-          <a:p>
-            <a:pPr>
-              <a:buChar char="•"/>
-            </a:pPr>
-            <a:r>
-              <a:rPr sz="1600"/>
-              <a:t>2026-10-02 · Step Step 16: agreement round 2 (Human+AI)</a:t>
-            </a:r>
-          </a:p>
-          <a:p>
-            <a:pPr>
-              <a:buChar char="•"/>
-            </a:pPr>
-            <a:r>
-              <a:rPr sz="1600"/>
-              <a:t>2026-10-02 · Step Step 17: position-bias note (AI-only exec, human read)</a:t>
-            </a:r>
-          </a:p>
-          <a:p>
-            <a:pPr>
-              <a:buChar char="•"/>
-            </a:pPr>
-            <a:r>
-              <a:rPr sz="1600"/>
-              <a:t>2026-10-02 · Step Step 18: verbosity-bias note (AI-only exec, human read)</a:t>
-            </a:r>
-          </a:p>
-          <a:p>
-            <a:pPr>
-              <a:buChar char="•"/>
-            </a:pPr>
-            <a:r>
-              <a:rPr sz="1600"/>
-              <a:t>2026-10-02 · Step Step 19: synthetic_tasks.csv (Human+AI)</a:t>
-            </a:r>
-          </a:p>
-          <a:p>
-            <a:pPr>
-              <a:buChar char="•"/>
-            </a:pPr>
-            <a:r>
-              <a:rPr sz="1600"/>
-              <a:t>2026-10-02 · Step Step 20: dashboard (Human+AI)</a:t>
-            </a:r>
-          </a:p>
-          <a:p>
-            <a:pPr>
-              <a:buChar char="•"/>
-            </a:pPr>
-            <a:r>
-              <a:rPr sz="1600"/>
-              <a:t>2026-10-02 · Step Step 21: summary (Human-only)</a:t>
+              <a:t>Appendix</a:t>
+            </a:r>
+          </a:p>
+          <a:p>
+            <a:pPr>
+              <a:buNone/>
+            </a:pPr>
+            <a:r>
+              <a:rPr sz="1800">
+                <a:solidFill>
+                  <a:srgbClr val="FFFFFF"/>
+                </a:solidFill>
+              </a:rPr>
+              <a:t>For the record.</a:t>
             </a:r>
           </a:p>
         </p:txBody>
@@ -3541,7 +3443,7 @@
                   <a:srgbClr val="1F3864"/>
                 </a:solidFill>
               </a:rPr>
-              <a:t>Open questions + Clip C</a:t>
+              <a:t>How to read this readout</a:t>
             </a:r>
           </a:p>
         </p:txBody>
@@ -3598,7 +3500,43 @@
             </a:pPr>
             <a:r>
               <a:rPr sz="1600"/>
-              <a:t>Clip C (adjudication walkthrough): not yet confirmed.</a:t>
+              <a:t>SHIP means both AI judges agreed with the human expert past the trust bar: their scores can stand in for human review. HOLD means at least one did not: do not trust that judge on that measure yet.</a:t>
+            </a:r>
+          </a:p>
+          <a:p>
+            <a:pPr>
+              <a:buChar char="•"/>
+            </a:pPr>
+            <a:r>
+              <a:rPr sz="1600"/>
+              <a:t>Kappa measures grader agreement after removing lucky agreement. 1.0 is perfect, 0 is chance. The trust bar is 0.60.</a:t>
+            </a:r>
+          </a:p>
+          <a:p>
+            <a:pPr>
+              <a:buChar char="•"/>
+            </a:pPr>
+            <a:r>
+              <a:rPr sz="1600"/>
+              <a:t>Each finding card follows one through-line: what we found, the evidence, why it matters, and a recommendation with an owner.</a:t>
+            </a:r>
+          </a:p>
+          <a:p>
+            <a:pPr>
+              <a:buChar char="•"/>
+            </a:pPr>
+            <a:r>
+              <a:rPr sz="1600"/>
+              <a:t>Trust scope: The team can trust Judge A for alt-text QA on standard-risk images. Do not trust Judge B on concision until re-prompted.</a:t>
+            </a:r>
+          </a:p>
+          <a:p>
+            <a:pPr>
+              <a:buChar char="•"/>
+            </a:pPr>
+            <a:r>
+              <a:rPr sz="1600"/>
+              <a:t>Full audit trail, grades, and inputs are in the offline package and the dashboard.</a:t>
             </a:r>
           </a:p>
         </p:txBody>
@@ -4135,6 +4073,305 @@
 </p:sld>
 </file>
 
+<file path=ppt/slides/slide30.xml><?xml version="1.0" encoding="utf-8"?>
+<p:sld xmlns:a="http://schemas.openxmlformats.org/drawingml/2006/main" xmlns:p="http://schemas.openxmlformats.org/presentationml/2006/main" xmlns:r="http://schemas.openxmlformats.org/officeDocument/2006/relationships">
+  <p:cSld>
+    <p:spTree>
+      <p:nvGrpSpPr>
+        <p:cNvPr id="1" name=""/>
+        <p:cNvGrpSpPr/>
+        <p:nvPr/>
+      </p:nvGrpSpPr>
+      <p:grpSpPr>
+        <a:xfrm>
+          <a:off x="0" y="0"/>
+          <a:ext cx="0" cy="0"/>
+          <a:chOff x="0" y="0"/>
+          <a:chExt cx="0" cy="0"/>
+        </a:xfrm>
+      </p:grpSpPr>
+      <p:sp>
+        <p:nvSpPr>
+          <p:cNvPr id="2" name="Title"/>
+          <p:cNvSpPr>
+            <a:spLocks noGrp="1"/>
+          </p:cNvSpPr>
+          <p:nvPr/>
+        </p:nvSpPr>
+        <p:spPr>
+          <a:xfrm>
+            <a:off x="685800" y="274638"/>
+            <a:ext cx="7772400" cy="800000"/>
+          </a:xfrm>
+          <a:prstGeom prst="rect">
+            <a:avLst/>
+          </a:prstGeom>
+          <a:noFill/>
+        </p:spPr>
+        <p:txBody>
+          <a:bodyPr wrap="square"/>
+          <a:lstStyle/>
+          <a:p>
+            <a:pPr>
+              <a:buNone/>
+            </a:pPr>
+            <a:r>
+              <a:rPr b="1" sz="2800">
+                <a:solidFill>
+                  <a:srgbClr val="1F3864"/>
+                </a:solidFill>
+              </a:rPr>
+              <a:t>Audit trail (mode log)</a:t>
+            </a:r>
+          </a:p>
+        </p:txBody>
+      </p:sp>
+      <p:sp>
+        <p:nvSpPr>
+          <p:cNvPr id="3" name="Rule"/>
+          <p:cNvSpPr>
+            <a:spLocks noGrp="1"/>
+          </p:cNvSpPr>
+          <p:nvPr/>
+        </p:nvSpPr>
+        <p:spPr>
+          <a:xfrm>
+            <a:off x="685800" y="1130000"/>
+            <a:ext cx="7772400" cy="45000"/>
+          </a:xfrm>
+          <a:prstGeom prst="rect">
+            <a:avLst/>
+          </a:prstGeom>
+          <a:solidFill>
+            <a:srgbClr val="2E75B6"/>
+          </a:solidFill>
+        </p:spPr>
+        <p:txBody>
+          <a:bodyPr wrap="square"/>
+          <a:lstStyle/>
+        </p:txBody>
+      </p:sp>
+      <p:sp>
+        <p:nvSpPr>
+          <p:cNvPr id="4" name="Content"/>
+          <p:cNvSpPr>
+            <a:spLocks noGrp="1"/>
+          </p:cNvSpPr>
+          <p:nvPr/>
+        </p:nvSpPr>
+        <p:spPr>
+          <a:xfrm>
+            <a:off x="685800" y="1350000"/>
+            <a:ext cx="7772400" cy="5000000"/>
+          </a:xfrm>
+          <a:prstGeom prst="rect">
+            <a:avLst/>
+          </a:prstGeom>
+          <a:noFill/>
+        </p:spPr>
+        <p:txBody>
+          <a:bodyPr wrap="square"/>
+          <a:lstStyle/>
+          <a:p>
+            <a:pPr>
+              <a:buChar char="•"/>
+            </a:pPr>
+            <a:r>
+              <a:rPr sz="1600"/>
+              <a:t>2026-10-02 · Step Step 14: adjudication verdict (Human-only)</a:t>
+            </a:r>
+          </a:p>
+          <a:p>
+            <a:pPr>
+              <a:buChar char="•"/>
+            </a:pPr>
+            <a:r>
+              <a:rPr sz="1600"/>
+              <a:t>2026-10-02 · Step Step 15: rubric v3 (Human-only)</a:t>
+            </a:r>
+          </a:p>
+          <a:p>
+            <a:pPr>
+              <a:buChar char="•"/>
+            </a:pPr>
+            <a:r>
+              <a:rPr sz="1600"/>
+              <a:t>2026-10-02 · Step Step 16: agreement round 2 (Human+AI)</a:t>
+            </a:r>
+          </a:p>
+          <a:p>
+            <a:pPr>
+              <a:buChar char="•"/>
+            </a:pPr>
+            <a:r>
+              <a:rPr sz="1600"/>
+              <a:t>2026-10-02 · Step Step 17: position-bias note (AI-only exec, human read)</a:t>
+            </a:r>
+          </a:p>
+          <a:p>
+            <a:pPr>
+              <a:buChar char="•"/>
+            </a:pPr>
+            <a:r>
+              <a:rPr sz="1600"/>
+              <a:t>2026-10-02 · Step Step 18: verbosity-bias note (AI-only exec, human read)</a:t>
+            </a:r>
+          </a:p>
+          <a:p>
+            <a:pPr>
+              <a:buChar char="•"/>
+            </a:pPr>
+            <a:r>
+              <a:rPr sz="1600"/>
+              <a:t>2026-10-02 · Step Step 19: synthetic_tasks.csv (Human+AI)</a:t>
+            </a:r>
+          </a:p>
+          <a:p>
+            <a:pPr>
+              <a:buChar char="•"/>
+            </a:pPr>
+            <a:r>
+              <a:rPr sz="1600"/>
+              <a:t>2026-10-02 · Step Step 20: dashboard (Human+AI)</a:t>
+            </a:r>
+          </a:p>
+          <a:p>
+            <a:pPr>
+              <a:buChar char="•"/>
+            </a:pPr>
+            <a:r>
+              <a:rPr sz="1600"/>
+              <a:t>2026-10-02 · Step Step 21: summary (Human-only)</a:t>
+            </a:r>
+          </a:p>
+        </p:txBody>
+      </p:sp>
+    </p:spTree>
+  </p:cSld>
+  <p:clrMapOvr>
+    <a:overrideClrMapping bg1="lt1" tx1="dk1" bg2="lt2" tx2="dk2" accent1="accent1" accent2="accent2" accent3="accent3" accent4="accent4" accent5="accent5" accent6="accent6" hlink="hlink" folHlink="folHlink"/>
+  </p:clrMapOvr>
+</p:sld>
+</file>
+
+<file path=ppt/slides/slide31.xml><?xml version="1.0" encoding="utf-8"?>
+<p:sld xmlns:a="http://schemas.openxmlformats.org/drawingml/2006/main" xmlns:p="http://schemas.openxmlformats.org/presentationml/2006/main" xmlns:r="http://schemas.openxmlformats.org/officeDocument/2006/relationships">
+  <p:cSld>
+    <p:spTree>
+      <p:nvGrpSpPr>
+        <p:cNvPr id="1" name=""/>
+        <p:cNvGrpSpPr/>
+        <p:nvPr/>
+      </p:nvGrpSpPr>
+      <p:grpSpPr>
+        <a:xfrm>
+          <a:off x="0" y="0"/>
+          <a:ext cx="0" cy="0"/>
+          <a:chOff x="0" y="0"/>
+          <a:chExt cx="0" cy="0"/>
+        </a:xfrm>
+      </p:grpSpPr>
+      <p:sp>
+        <p:nvSpPr>
+          <p:cNvPr id="2" name="Title"/>
+          <p:cNvSpPr>
+            <a:spLocks noGrp="1"/>
+          </p:cNvSpPr>
+          <p:nvPr/>
+        </p:nvSpPr>
+        <p:spPr>
+          <a:xfrm>
+            <a:off x="685800" y="274638"/>
+            <a:ext cx="7772400" cy="800000"/>
+          </a:xfrm>
+          <a:prstGeom prst="rect">
+            <a:avLst/>
+          </a:prstGeom>
+          <a:noFill/>
+        </p:spPr>
+        <p:txBody>
+          <a:bodyPr wrap="square"/>
+          <a:lstStyle/>
+          <a:p>
+            <a:pPr>
+              <a:buNone/>
+            </a:pPr>
+            <a:r>
+              <a:rPr b="1" sz="2800">
+                <a:solidFill>
+                  <a:srgbClr val="1F3864"/>
+                </a:solidFill>
+              </a:rPr>
+              <a:t>Open questions + Clip C</a:t>
+            </a:r>
+          </a:p>
+        </p:txBody>
+      </p:sp>
+      <p:sp>
+        <p:nvSpPr>
+          <p:cNvPr id="3" name="Rule"/>
+          <p:cNvSpPr>
+            <a:spLocks noGrp="1"/>
+          </p:cNvSpPr>
+          <p:nvPr/>
+        </p:nvSpPr>
+        <p:spPr>
+          <a:xfrm>
+            <a:off x="685800" y="1130000"/>
+            <a:ext cx="7772400" cy="45000"/>
+          </a:xfrm>
+          <a:prstGeom prst="rect">
+            <a:avLst/>
+          </a:prstGeom>
+          <a:solidFill>
+            <a:srgbClr val="2E75B6"/>
+          </a:solidFill>
+        </p:spPr>
+        <p:txBody>
+          <a:bodyPr wrap="square"/>
+          <a:lstStyle/>
+        </p:txBody>
+      </p:sp>
+      <p:sp>
+        <p:nvSpPr>
+          <p:cNvPr id="4" name="Content"/>
+          <p:cNvSpPr>
+            <a:spLocks noGrp="1"/>
+          </p:cNvSpPr>
+          <p:nvPr/>
+        </p:nvSpPr>
+        <p:spPr>
+          <a:xfrm>
+            <a:off x="685800" y="1350000"/>
+            <a:ext cx="7772400" cy="5000000"/>
+          </a:xfrm>
+          <a:prstGeom prst="rect">
+            <a:avLst/>
+          </a:prstGeom>
+          <a:noFill/>
+        </p:spPr>
+        <p:txBody>
+          <a:bodyPr wrap="square"/>
+          <a:lstStyle/>
+          <a:p>
+            <a:pPr>
+              <a:buChar char="•"/>
+            </a:pPr>
+            <a:r>
+              <a:rPr sz="1600"/>
+              <a:t>Clip C (adjudication walkthrough): not yet confirmed.</a:t>
+            </a:r>
+          </a:p>
+        </p:txBody>
+      </p:sp>
+    </p:spTree>
+  </p:cSld>
+  <p:clrMapOvr>
+    <a:overrideClrMapping bg1="lt1" tx1="dk1" bg2="lt2" tx2="dk2" accent1="accent1" accent2="accent2" accent3="accent3" accent4="accent4" accent5="accent5" accent6="accent6" hlink="hlink" folHlink="folHlink"/>
+  </p:clrMapOvr>
+</p:sld>
+</file>
+
 <file path=ppt/slides/slide4.xml><?xml version="1.0" encoding="utf-8"?>
 <p:sld xmlns:a="http://schemas.openxmlformats.org/drawingml/2006/main" xmlns:p="http://schemas.openxmlformats.org/presentationml/2006/main" xmlns:r="http://schemas.openxmlformats.org/officeDocument/2006/relationships">
   <p:cSld>
@@ -4753,7 +4990,7 @@
                   <a:srgbClr val="1F3864"/>
                 </a:solidFill>
               </a:rPr>
-              <a:t>Rubric v2 (constructs)</a:t>
+              <a:t>Task, Run, Grader: the three design choices</a:t>
             </a:r>
           </a:p>
         </p:txBody>
@@ -4810,7 +5047,16 @@
             </a:pPr>
             <a:r>
               <a:rPr b="1" sz="1600"/>
-              <a:t>descriptive_accuracy: The alt text correctly describes what is actually visible: objects, setting, and the salient visual details a sighted person would notice.</a:t>
+              <a:t>Task: what behavior you care about.</a:t>
+            </a:r>
+          </a:p>
+          <a:p>
+            <a:pPr>
+              <a:buChar char="•"/>
+            </a:pPr>
+            <a:r>
+              <a:rPr sz="1600"/>
+              <a:t>For agentic features: a user request plus an environment (tools, data, permissions). "Given this request and this environment, what should the agent do?"</a:t>
             </a:r>
           </a:p>
           <a:p>
@@ -4819,7 +5065,16 @@
             </a:pPr>
             <a:r>
               <a:rPr b="1" sz="1600"/>
-              <a:t>functional_usefulness: The alt text serves the listener's actual need in context: a PowerPoint audience member on a screen reader learns what the image is doing on the slide, not just what it looks like.</a:t>
+              <a:t>Run: one end-to-end execution.</a:t>
+            </a:r>
+          </a:p>
+          <a:p>
+            <a:pPr>
+              <a:buChar char="•"/>
+            </a:pPr>
+            <a:r>
+              <a:rPr sz="1600"/>
+              <a:t>The full trace: prompts, intermediate reasoning, every tool call (name, arguments, result), every state change, and the final outcome. The run is the unit of evaluation.</a:t>
             </a:r>
           </a:p>
           <a:p>
@@ -4828,7 +5083,25 @@
             </a:pPr>
             <a:r>
               <a:rPr b="1" sz="1600"/>
-              <a:t>concision: The alt text is appropriately brief: complete in one breath, roughly under 125 characters, with no filler phrases like 'image of' or 'in this image we can see'.</a:t>
+              <a:t>Grader: whatever decides whether the agent succeeded.</a:t>
+            </a:r>
+          </a:p>
+          <a:p>
+            <a:pPr>
+              <a:buChar char="•"/>
+            </a:pPr>
+            <a:r>
+              <a:rPr sz="1600"/>
+              <a:t>A person, a code-based check, or an AI judge. Each grader type must earn its job (next slide).</a:t>
+            </a:r>
+          </a:p>
+          <a:p>
+            <a:pPr>
+              <a:buChar char="•"/>
+            </a:pPr>
+            <a:r>
+              <a:rPr sz="1600"/>
+              <a:t>PANEL grades the run, not just the final text: a right answer reached the wrong way is a failure users will eventually feel.</a:t>
             </a:r>
           </a:p>
         </p:txBody>
@@ -4860,41 +5133,16 @@
       </p:grpSpPr>
       <p:sp>
         <p:nvSpPr>
-          <p:cNvPr id="2" name="BG"/>
-          <p:cNvSpPr>
-            <a:spLocks noGrp="1"/>
-          </p:cNvSpPr>
-          <p:nvPr/>
-        </p:nvSpPr>
-        <p:spPr>
-          <a:xfrm>
-            <a:off x="0" y="0"/>
-            <a:ext cx="9144000" cy="6858000"/>
-          </a:xfrm>
-          <a:prstGeom prst="rect">
-            <a:avLst/>
-          </a:prstGeom>
-          <a:solidFill>
-            <a:srgbClr val="0F6CBD"/>
-          </a:solidFill>
-        </p:spPr>
-        <p:txBody>
-          <a:bodyPr wrap="square"/>
-          <a:lstStyle/>
-        </p:txBody>
-      </p:sp>
-      <p:sp>
-        <p:nvSpPr>
-          <p:cNvPr id="3" name="SecTitle"/>
-          <p:cNvSpPr>
-            <a:spLocks noGrp="1"/>
-          </p:cNvSpPr>
-          <p:nvPr/>
-        </p:nvSpPr>
-        <p:spPr>
-          <a:xfrm>
-            <a:off x="685800" y="2500000"/>
-            <a:ext cx="7772400" cy="1400000"/>
+          <p:cNvPr id="2" name="Title"/>
+          <p:cNvSpPr>
+            <a:spLocks noGrp="1"/>
+          </p:cNvSpPr>
+          <p:nvPr/>
+        </p:nvSpPr>
+        <p:spPr>
+          <a:xfrm>
+            <a:off x="685800" y="274638"/>
+            <a:ext cx="7772400" cy="800000"/>
           </a:xfrm>
           <a:prstGeom prst="rect">
             <a:avLst/>
@@ -4909,25 +5157,123 @@
               <a:buNone/>
             </a:pPr>
             <a:r>
-              <a:rPr b="1" sz="4000">
+              <a:rPr b="1" sz="2800">
                 <a:solidFill>
-                  <a:srgbClr val="FFFFFF"/>
+                  <a:srgbClr val="1F3864"/>
                 </a:solidFill>
               </a:rPr>
-              <a:t>Findings</a:t>
-            </a:r>
-          </a:p>
-          <a:p>
-            <a:pPr>
-              <a:buNone/>
-            </a:pPr>
-            <a:r>
-              <a:rPr sz="1800">
-                <a:solidFill>
-                  <a:srgbClr val="FFFFFF"/>
-                </a:solidFill>
-              </a:rPr>
-              <a:t>What the panel found.</a:t>
+              <a:t>Three kinds of graders, three jobs</a:t>
+            </a:r>
+          </a:p>
+        </p:txBody>
+      </p:sp>
+      <p:sp>
+        <p:nvSpPr>
+          <p:cNvPr id="3" name="Rule"/>
+          <p:cNvSpPr>
+            <a:spLocks noGrp="1"/>
+          </p:cNvSpPr>
+          <p:nvPr/>
+        </p:nvSpPr>
+        <p:spPr>
+          <a:xfrm>
+            <a:off x="685800" y="1130000"/>
+            <a:ext cx="7772400" cy="45000"/>
+          </a:xfrm>
+          <a:prstGeom prst="rect">
+            <a:avLst/>
+          </a:prstGeom>
+          <a:solidFill>
+            <a:srgbClr val="2E75B6"/>
+          </a:solidFill>
+        </p:spPr>
+        <p:txBody>
+          <a:bodyPr wrap="square"/>
+          <a:lstStyle/>
+        </p:txBody>
+      </p:sp>
+      <p:sp>
+        <p:nvSpPr>
+          <p:cNvPr id="4" name="Content"/>
+          <p:cNvSpPr>
+            <a:spLocks noGrp="1"/>
+          </p:cNvSpPr>
+          <p:nvPr/>
+        </p:nvSpPr>
+        <p:spPr>
+          <a:xfrm>
+            <a:off x="685800" y="1350000"/>
+            <a:ext cx="7772400" cy="5000000"/>
+          </a:xfrm>
+          <a:prstGeom prst="rect">
+            <a:avLst/>
+          </a:prstGeom>
+          <a:noFill/>
+        </p:spPr>
+        <p:txBody>
+          <a:bodyPr wrap="square"/>
+          <a:lstStyle/>
+          <a:p>
+            <a:pPr>
+              <a:buChar char="•"/>
+            </a:pPr>
+            <a:r>
+              <a:rPr b="1" sz="1600"/>
+              <a:t>Code-based graders (deterministic scripts): what a script can check exactly.</a:t>
+            </a:r>
+          </a:p>
+          <a:p>
+            <a:pPr>
+              <a:buChar char="•"/>
+            </a:pPr>
+            <a:r>
+              <a:rPr sz="1600"/>
+              <a:t>Formats, schemas, allowed tool sets, argument validity, state diffs. Cheap, reproducible, zero variance: they run first as a gate. Tested against valid variations, never trusted on kappa.</a:t>
+            </a:r>
+          </a:p>
+          <a:p>
+            <a:pPr>
+              <a:buChar char="•"/>
+            </a:pPr>
+            <a:r>
+              <a:rPr b="1" sz="1600"/>
+              <a:t>AI judges: what needs judgment about meaning or quality.</a:t>
+            </a:r>
+          </a:p>
+          <a:p>
+            <a:pPr>
+              <a:buChar char="•"/>
+            </a:pPr>
+            <a:r>
+              <a:rPr sz="1600"/>
+              <a:t>Relevance, reasoning soundness, tone. They grade unsupervised only after clearing the trust bar (kappa ≥ 0.60) against human grades.</a:t>
+            </a:r>
+          </a:p>
+          <a:p>
+            <a:pPr>
+              <a:buChar char="•"/>
+            </a:pPr>
+            <a:r>
+              <a:rPr b="1" sz="1600"/>
+              <a:t>Humans: what defines correctness.</a:t>
+            </a:r>
+          </a:p>
+          <a:p>
+            <a:pPr>
+              <a:buChar char="•"/>
+            </a:pPr>
+            <a:r>
+              <a:rPr sz="1600"/>
+              <a:t>Ground truth, dispute resolution, production spot-checks. Expensive, never replaced.</a:t>
+            </a:r>
+          </a:p>
+          <a:p>
+            <a:pPr>
+              <a:buChar char="•"/>
+            </a:pPr>
+            <a:r>
+              <a:rPr sz="1600"/>
+              <a:t>For agentic runs: code checks trace structure, AI judges assess trace quality, humans adjudicate the hard cases.</a:t>
             </a:r>
           </a:p>
         </p:txBody>
